--- a/docs/common/marketing/presentations/DRP-comercial.pptx
+++ b/docs/common/marketing/presentations/DRP-comercial.pptx
@@ -753,7 +753,7 @@
           <a:p>
             <a:r>
               <a:rPr lang="en-US" dirty="0"/>
-              <a:t>Portada. Presentación comercial de DRP, dirigida a quien no conoce el proyecto: inversión, colaboradores y primeros hogares piloto. Procede del README §1 y refleja su estado a 2026-08-19: Fases 1 y 2 cerradas, cuatro de trece módulos construidos y ningún despliegue todavía.</a:t>
+              <a:t>Portada. Presentación comercial de DRP, dirigida a quien no conoce el proyecto: inversión, colaboradores y primeros hogares piloto. Procede del README §1 y refleja su estado a 2026-08-20: Fases 1 y 2 y el cierre de huecos cerrados, cuatro de trece módulos construidos y ningún despliegue todavía.</a:t>
             </a:r>
             <a:endParaRPr lang="en-US" dirty="0"/>
           </a:p>

--- a/docs/common/marketing/presentations/DRP-comercial.pptx
+++ b/docs/common/marketing/presentations/DRP-comercial.pptx
@@ -21,9 +21,10 @@
     <p:sldId id="269" r:id="rId15"/>
     <p:sldId id="270" r:id="rId16"/>
     <p:sldId id="271" r:id="rId17"/>
+    <p:sldId id="272" r:id="rId18"/>
   </p:sldIdLst>
   <p:notesMasterIdLst>
-    <p:notesMasterId r:id="rId18"/>
+    <p:notesMasterId r:id="rId19"/>
   </p:notesMasterIdLst>
   <p:sldSz cx="12192000" cy="6858000"/>
   <p:notesSz cx="6858000" cy="12192000"/>
@@ -753,7 +754,7 @@
           <a:p>
             <a:r>
               <a:rPr lang="en-US" dirty="0"/>
-              <a:t>Portada. Presentación comercial de DRP, dirigida a quien no conoce el proyecto: inversión, colaboradores y primeros hogares piloto. Procede del README §1 y refleja su estado a 2026-08-20: Fases 1 y 2 y el cierre de huecos cerrados, cuatro de trece módulos construidos y ningún despliegue todavía.</a:t>
+              <a:t>Portada. Presentación comercial de DRP, dirigida a quien no conoce el proyecto: inversión, colaboradores y primeros hogares piloto. Procede del README §1 y refleja su estado a 2026-08-21: Fases 1 y 2, cierre de huecos y despliegue cerrados (ADR-016), cuatro de trece módulos construidos y ningún hogar real dentro todavía.</a:t>
             </a:r>
             <a:endParaRPr lang="en-US" dirty="0"/>
           </a:p>
@@ -929,7 +930,7 @@
           <a:p>
             <a:r>
               <a:rPr lang="en-US" dirty="0"/>
-              <a:t>README §5.5 (Frontend responsive): enfoque mobile-first, de 375 px a ultrawide. Y §6, fila de accesibilidad: WCAG 2.2 nivel AA como objetivo normativo verificable, comprobado en navegador real dentro del recorrido vertical.</a:t>
+              <a:t>README §5.5 (Frontend responsive): enfoque mobile-first, de 375 px a ultrawide. Y §6, fila de accesibilidad: WCAG 2.2 nivel AA como objetivo normativo verificable, comprobado en navegador real dentro del recorrido vertical. Los dos dispositivos enseñan capturas reales de la pantalla «Hogar» (2026-08-21, hogar de demostración), no maquetas dibujadas.</a:t>
             </a:r>
             <a:endParaRPr lang="en-US" dirty="0"/>
           </a:p>
@@ -1017,7 +1018,7 @@
           <a:p>
             <a:r>
               <a:rPr lang="en-US" dirty="0"/>
-              <a:t>README §8 (Roadmap y estado actual) con el detalle de 8.2 y 8.3, y la nota de §4.2 que explica por qué los cuatro módulos construidos siguen en «En desarrollo»: no hay despliegue, ni hogar real, ni nadie usando el producto.</a:t>
+              <a:t>Capturas reales de la aplicación (2026-08-21): «Compras» en escritorio y el menú «Más» en ancho de móvil, modo claro, con el hogar de demostración de scripts/seed-demo-data.sql. La nota de los dos modos procede de la CI (comprobación de contraste sobre los tokens de color) y de la auditoría de accesibilidad del recorrido vertical.</a:t>
             </a:r>
             <a:endParaRPr lang="en-US" dirty="0"/>
           </a:p>
@@ -1105,7 +1106,7 @@
           <a:p>
             <a:r>
               <a:rPr lang="en-US" dirty="0"/>
-              <a:t>README §4.2 (trece módulos, cuatro construidos y en desarrollo) y §8 (cuatro fases, tres de ellas cerradas, y la Fase 3 pendiente sin planificar). El cero de hogares es literal: §4.2 declara que no hay despliegue, ni servidor contratado, ni nadie usando el producto.</a:t>
+              <a:t>README §8 (Roadmap y estado actual) con el detalle de 8.2, 8.3 y 8.5, y la nota de §4.2: el despliegue existe desde el 2026-08-21 (ADR-016) y el motivo de «En desarrollo» se muda — ya no es «no hay despliegue» sino «no hay ningún hogar real dentro».</a:t>
             </a:r>
             <a:endParaRPr lang="en-US" dirty="0"/>
           </a:p>
@@ -1193,7 +1194,7 @@
           <a:p>
             <a:r>
               <a:rPr lang="en-US" dirty="0"/>
-              <a:t>README §6 (fila de despliegue: VPS elegido con consumo medido, no contratado), §4.2 (las dos decisiones abiertas cuyo responsable pasó a ser «la primera revisión de operación con hogares reales dentro») y §8.3 (el camino de módulo recorrido cuatro veces).</a:t>
+              <a:t>README §4.2 (trece módulos, cuatro construidos y en desarrollo) y §8 (cuatro fases, tres de ellas cerradas, y la Fase 3 pendiente sin planificar). El cero de hogares es literal: §4.2 declara que el despliegue existe desde el 2026-08-21 y que lo que falta es un hogar real dentro.</a:t>
             </a:r>
             <a:endParaRPr lang="en-US" dirty="0"/>
           </a:p>
@@ -1281,7 +1282,7 @@
           <a:p>
             <a:r>
               <a:rPr lang="en-US" dirty="0"/>
-              <a:t>README §8 y §4.2: cierre y llamada a la acción. Las tres peticiones —hogares piloto, colaboradores e inversión— se corresponden con los tres huecos declarados en la diapositiva anterior. El bloque de contacto se rellena en el generador antes de cada envío; no se inventa.</a:t>
+              <a:t>README §8.5 y ADR-016 (despliegue completado; dominio y TLS deliberadamente fuera hasta el primer hogar ajeno), §4.2 (las dos decisiones abiertas cuyo responsable pasó a ser «la primera revisión de operación con hogares reales dentro») y §8.3 (el camino de módulo recorrido cuatro veces).</a:t>
             </a:r>
             <a:endParaRPr lang="en-US" dirty="0"/>
           </a:p>
@@ -1369,7 +1370,7 @@
           <a:p>
             <a:r>
               <a:rPr lang="en-US" dirty="0"/>
-              <a:t>Diapositiva de agradecimiento y créditos. Es obligatoria: la plantilla «Pitch Deck Minitheme» de Slidesgo se descargó con cuenta gratuita, y su licencia exige conservar la diapositiva de agradecimiento en cualquier presentación derivada. No se retira mientras esta presentación salga fuera. Ver docs/common/marketing/README.md.</a:t>
+              <a:t>README §8 y §4.2: cierre y llamada a la acción. Las tres peticiones —hogares piloto, colaboradores e inversión— se corresponden con los tres huecos declarados en la diapositiva anterior. El bloque de contacto se rellena en el generador antes de cada envío; no se inventa.</a:t>
             </a:r>
             <a:endParaRPr lang="en-US" dirty="0"/>
           </a:p>
@@ -1393,6 +1394,94 @@
             <a:fld id="{F7021451-1387-4CA6-816F-3879F97B5CBC}" type="slidenum">
               <a:rPr lang="en-US"/>
               <a:t>16</a:t>
+            </a:fld>
+            <a:endParaRPr lang="en-US"/>
+          </a:p>
+        </p:txBody>
+      </p:sp>
+    </p:spTree>
+    <p:extLst>
+      <p:ext uri="{BB962C8B-B14F-4D97-AF65-F5344CB8AC3E}">
+        <p14:creationId xmlns:p14="http://schemas.microsoft.com/office/powerpoint/2010/main" val="1024086991"/>
+      </p:ext>
+    </p:extLst>
+  </p:cSld>
+  <p:clrMapOvr>
+    <a:masterClrMapping/>
+  </p:clrMapOvr>
+</p:notes>
+</file>
+
+<file path=ppt/notesSlides/notesSlide17.xml><?xml version="1.0" encoding="utf-8"?>
+<p:notes xmlns:a="http://schemas.openxmlformats.org/drawingml/2006/main" xmlns:r="http://schemas.openxmlformats.org/officeDocument/2006/relationships" xmlns:p="http://schemas.openxmlformats.org/presentationml/2006/main">
+  <p:cSld>
+    <p:spTree>
+      <p:nvGrpSpPr>
+        <p:cNvPr id="1" name=""/>
+        <p:cNvGrpSpPr/>
+        <p:nvPr/>
+      </p:nvGrpSpPr>
+      <p:grpSpPr>
+        <a:xfrm>
+          <a:off x="0" y="0"/>
+          <a:ext cx="0" cy="0"/>
+          <a:chOff x="0" y="0"/>
+          <a:chExt cx="0" cy="0"/>
+        </a:xfrm>
+      </p:grpSpPr>
+      <p:sp>
+        <p:nvSpPr>
+          <p:cNvPr id="2" name="Slide Image Placeholder 1"/>
+          <p:cNvSpPr>
+            <a:spLocks noGrp="1" noRot="1" noChangeAspect="1"/>
+          </p:cNvSpPr>
+          <p:nvPr>
+            <p:ph type="sldImg"/>
+          </p:nvPr>
+        </p:nvSpPr>
+        <p:spPr/>
+      </p:sp>
+      <p:sp>
+        <p:nvSpPr>
+          <p:cNvPr id="3" name="Notes Placeholder 2"/>
+          <p:cNvSpPr>
+            <a:spLocks noGrp="1"/>
+          </p:cNvSpPr>
+          <p:nvPr>
+            <p:ph type="body" idx="1"/>
+          </p:nvPr>
+        </p:nvSpPr>
+        <p:spPr/>
+        <p:txBody>
+          <a:bodyPr/>
+          <a:lstStyle/>
+          <a:p>
+            <a:r>
+              <a:rPr lang="en-US" dirty="0"/>
+              <a:t>Diapositiva de agradecimiento y créditos. Es obligatoria: la plantilla «Pitch Deck Minitheme» de Slidesgo se descargó con cuenta gratuita, y su licencia exige conservar la diapositiva de agradecimiento en cualquier presentación derivada. No se retira mientras esta presentación salga fuera. Ver docs/common/marketing/README.md.</a:t>
+            </a:r>
+            <a:endParaRPr lang="en-US" dirty="0"/>
+          </a:p>
+        </p:txBody>
+      </p:sp>
+      <p:sp>
+        <p:nvSpPr>
+          <p:cNvPr id="4" name="Slide Number Placeholder 3"/>
+          <p:cNvSpPr>
+            <a:spLocks noGrp="1"/>
+          </p:cNvSpPr>
+          <p:nvPr>
+            <p:ph type="sldNum" sz="quarter" idx="10"/>
+          </p:nvPr>
+        </p:nvSpPr>
+        <p:spPr/>
+        <p:txBody>
+          <a:bodyPr/>
+          <a:lstStyle/>
+          <a:p>
+            <a:fld id="{F7021451-1387-4CA6-816F-3879F97B5CBC}" type="slidenum">
+              <a:rPr lang="en-US"/>
+              <a:t>17</a:t>
             </a:fld>
             <a:endParaRPr lang="en-US"/>
           </a:p>
@@ -2614,7 +2703,7 @@
         <p:spPr>
           <a:xfrm>
             <a:off x="868680" y="4498848"/>
-            <a:ext cx="1993392" cy="384048"/>
+            <a:ext cx="1385316" cy="384048"/>
           </a:xfrm>
           <a:prstGeom prst="roundRect">
             <a:avLst>
@@ -2641,7 +2730,7 @@
         <p:spPr>
           <a:xfrm>
             <a:off x="868680" y="4498848"/>
-            <a:ext cx="1993392" cy="384048"/>
+            <a:ext cx="1385316" cy="384048"/>
           </a:xfrm>
           <a:prstGeom prst="rect">
             <a:avLst/>
@@ -2665,7 +2754,7 @@
                 <a:ea typeface="Calibri" pitchFamily="34" charset="-122"/>
                 <a:cs typeface="Calibri" pitchFamily="34" charset="-120"/>
               </a:rPr>
-              <a:t>Fases 1 y 2 cerradas</a:t>
+              <a:t>En producción</a:t>
             </a:r>
             <a:endParaRPr lang="en-US" sz="1150" dirty="0"/>
           </a:p>
@@ -2679,7 +2768,7 @@
         </p:nvSpPr>
         <p:spPr>
           <a:xfrm>
-            <a:off x="3026664" y="4498848"/>
+            <a:off x="2418588" y="4498848"/>
             <a:ext cx="2601468" cy="384048"/>
           </a:xfrm>
           <a:prstGeom prst="roundRect">
@@ -2706,7 +2795,7 @@
         </p:nvSpPr>
         <p:spPr>
           <a:xfrm>
-            <a:off x="3026664" y="4498848"/>
+            <a:off x="2418588" y="4498848"/>
             <a:ext cx="2601468" cy="384048"/>
           </a:xfrm>
           <a:prstGeom prst="rect">
@@ -2745,7 +2834,7 @@
         </p:nvSpPr>
         <p:spPr>
           <a:xfrm>
-            <a:off x="5792724" y="4498848"/>
+            <a:off x="5184648" y="4498848"/>
             <a:ext cx="1472184" cy="384048"/>
           </a:xfrm>
           <a:prstGeom prst="roundRect">
@@ -2772,7 +2861,7 @@
         </p:nvSpPr>
         <p:spPr>
           <a:xfrm>
-            <a:off x="5792724" y="4498848"/>
+            <a:off x="5184648" y="4498848"/>
             <a:ext cx="1472184" cy="384048"/>
           </a:xfrm>
           <a:prstGeom prst="rect">
@@ -4959,405 +5048,33 @@
           </a:effectLst>
         </p:spPr>
       </p:sp>
-      <p:sp>
-        <p:nvSpPr>
-          <p:cNvPr id="15" name="Shape 13"/>
-          <p:cNvSpPr/>
-          <p:nvPr/>
-        </p:nvSpPr>
-        <p:spPr>
-          <a:xfrm>
-            <a:off x="6153912" y="1737360"/>
-            <a:ext cx="1636776" cy="3419856"/>
-          </a:xfrm>
-          <a:prstGeom prst="roundRect">
-            <a:avLst>
-              <a:gd name="adj" fmla="val 2793"/>
-            </a:avLst>
-          </a:prstGeom>
-          <a:solidFill>
-            <a:srgbClr val="FFFFFF"/>
-          </a:solidFill>
-          <a:ln w="12700">
-            <a:solidFill>
-              <a:srgbClr val="D3DFDC"/>
-            </a:solidFill>
-            <a:prstDash val="solid"/>
-          </a:ln>
-        </p:spPr>
-      </p:sp>
-      <p:sp>
-        <p:nvSpPr>
-          <p:cNvPr id="16" name="Text 14"/>
-          <p:cNvSpPr/>
-          <p:nvPr/>
-        </p:nvSpPr>
-        <p:spPr>
-          <a:xfrm>
-            <a:off x="6291072" y="1865376"/>
-            <a:ext cx="1362456" cy="274320"/>
-          </a:xfrm>
-          <a:prstGeom prst="rect">
-            <a:avLst/>
-          </a:prstGeom>
-          <a:noFill/>
-          <a:ln/>
-        </p:spPr>
-        <p:txBody>
-          <a:bodyPr wrap="square" lIns="0" tIns="0" rIns="0" bIns="0" rtlCol="0" anchor="ctr"/>
-          <a:lstStyle/>
-          <a:p>
-            <a:pPr indent="0" marL="0">
-              <a:buNone/>
-            </a:pPr>
-            <a:r>
-              <a:rPr lang="en-US" sz="1100" b="1" dirty="0">
-                <a:solidFill>
-                  <a:srgbClr val="12312F"/>
-                </a:solidFill>
-                <a:latin typeface="Calibri" pitchFamily="34" charset="0"/>
-                <a:ea typeface="Calibri" pitchFamily="34" charset="-122"/>
-                <a:cs typeface="Calibri" pitchFamily="34" charset="-120"/>
-              </a:rPr>
-              <a:t>Trastero</a:t>
-            </a:r>
-            <a:endParaRPr lang="en-US" sz="1100" dirty="0"/>
-          </a:p>
-        </p:txBody>
-      </p:sp>
-      <p:sp>
-        <p:nvSpPr>
-          <p:cNvPr id="17" name="Shape 15"/>
-          <p:cNvSpPr/>
-          <p:nvPr/>
-        </p:nvSpPr>
-        <p:spPr>
-          <a:xfrm>
-            <a:off x="6272784" y="2231136"/>
-            <a:ext cx="1399032" cy="402336"/>
-          </a:xfrm>
-          <a:prstGeom prst="roundRect">
-            <a:avLst>
-              <a:gd name="adj" fmla="val 13636"/>
-            </a:avLst>
-          </a:prstGeom>
-          <a:solidFill>
-            <a:srgbClr val="E3EDEA"/>
-          </a:solidFill>
-          <a:ln w="6350">
-            <a:solidFill>
-              <a:srgbClr val="E3EDEA"/>
-            </a:solidFill>
-            <a:prstDash val="solid"/>
-          </a:ln>
-        </p:spPr>
-      </p:sp>
-      <p:sp>
-        <p:nvSpPr>
-          <p:cNvPr id="18" name="Text 16"/>
-          <p:cNvSpPr/>
-          <p:nvPr/>
-        </p:nvSpPr>
-        <p:spPr>
-          <a:xfrm>
-            <a:off x="6382512" y="2231136"/>
-            <a:ext cx="1179576" cy="402336"/>
-          </a:xfrm>
-          <a:prstGeom prst="rect">
-            <a:avLst/>
-          </a:prstGeom>
-          <a:noFill/>
-          <a:ln/>
-        </p:spPr>
-        <p:txBody>
-          <a:bodyPr wrap="square" lIns="0" tIns="0" rIns="0" bIns="0" rtlCol="0" anchor="ctr"/>
-          <a:lstStyle/>
-          <a:p>
-            <a:pPr indent="0" marL="0">
-              <a:buNone/>
-            </a:pPr>
-            <a:r>
-              <a:rPr lang="en-US" sz="950" dirty="0">
-                <a:solidFill>
-                  <a:srgbClr val="1C4644"/>
-                </a:solidFill>
-                <a:latin typeface="Calibri" pitchFamily="34" charset="0"/>
-                <a:ea typeface="Calibri" pitchFamily="34" charset="-122"/>
-                <a:cs typeface="Calibri" pitchFamily="34" charset="-120"/>
-              </a:rPr>
-              <a:t>Taladro</a:t>
-            </a:r>
-            <a:endParaRPr lang="en-US" sz="950" dirty="0"/>
-          </a:p>
-        </p:txBody>
-      </p:sp>
-      <p:sp>
-        <p:nvSpPr>
-          <p:cNvPr id="19" name="Shape 17"/>
-          <p:cNvSpPr/>
-          <p:nvPr/>
-        </p:nvSpPr>
-        <p:spPr>
-          <a:xfrm>
-            <a:off x="6272784" y="2734056"/>
-            <a:ext cx="1399032" cy="402336"/>
-          </a:xfrm>
-          <a:prstGeom prst="roundRect">
-            <a:avLst>
-              <a:gd name="adj" fmla="val 13636"/>
-            </a:avLst>
-          </a:prstGeom>
-          <a:solidFill>
-            <a:srgbClr val="E3EDEA"/>
-          </a:solidFill>
-          <a:ln w="6350">
-            <a:solidFill>
-              <a:srgbClr val="E3EDEA"/>
-            </a:solidFill>
-            <a:prstDash val="solid"/>
-          </a:ln>
-        </p:spPr>
-      </p:sp>
-      <p:sp>
-        <p:nvSpPr>
-          <p:cNvPr id="20" name="Text 18"/>
-          <p:cNvSpPr/>
-          <p:nvPr/>
-        </p:nvSpPr>
-        <p:spPr>
-          <a:xfrm>
-            <a:off x="6382512" y="2734056"/>
-            <a:ext cx="1179576" cy="402336"/>
-          </a:xfrm>
-          <a:prstGeom prst="rect">
-            <a:avLst/>
-          </a:prstGeom>
-          <a:noFill/>
-          <a:ln/>
-        </p:spPr>
-        <p:txBody>
-          <a:bodyPr wrap="square" lIns="0" tIns="0" rIns="0" bIns="0" rtlCol="0" anchor="ctr"/>
-          <a:lstStyle/>
-          <a:p>
-            <a:pPr indent="0" marL="0">
-              <a:buNone/>
-            </a:pPr>
-            <a:r>
-              <a:rPr lang="en-US" sz="950" dirty="0">
-                <a:solidFill>
-                  <a:srgbClr val="1C4644"/>
-                </a:solidFill>
-                <a:latin typeface="Calibri" pitchFamily="34" charset="0"/>
-                <a:ea typeface="Calibri" pitchFamily="34" charset="-122"/>
-                <a:cs typeface="Calibri" pitchFamily="34" charset="-120"/>
-              </a:rPr>
-              <a:t>Escalera</a:t>
-            </a:r>
-            <a:endParaRPr lang="en-US" sz="950" dirty="0"/>
-          </a:p>
-        </p:txBody>
-      </p:sp>
-      <p:sp>
-        <p:nvSpPr>
-          <p:cNvPr id="21" name="Shape 19"/>
-          <p:cNvSpPr/>
-          <p:nvPr/>
-        </p:nvSpPr>
-        <p:spPr>
-          <a:xfrm>
-            <a:off x="6272784" y="3236976"/>
-            <a:ext cx="1399032" cy="402336"/>
-          </a:xfrm>
-          <a:prstGeom prst="roundRect">
-            <a:avLst>
-              <a:gd name="adj" fmla="val 13636"/>
-            </a:avLst>
-          </a:prstGeom>
-          <a:solidFill>
-            <a:srgbClr val="E3EDEA"/>
-          </a:solidFill>
-          <a:ln w="6350">
-            <a:solidFill>
-              <a:srgbClr val="E3EDEA"/>
-            </a:solidFill>
-            <a:prstDash val="solid"/>
-          </a:ln>
-        </p:spPr>
-      </p:sp>
-      <p:sp>
-        <p:nvSpPr>
-          <p:cNvPr id="22" name="Text 20"/>
-          <p:cNvSpPr/>
-          <p:nvPr/>
-        </p:nvSpPr>
-        <p:spPr>
-          <a:xfrm>
-            <a:off x="6382512" y="3236976"/>
-            <a:ext cx="1179576" cy="402336"/>
-          </a:xfrm>
-          <a:prstGeom prst="rect">
-            <a:avLst/>
-          </a:prstGeom>
-          <a:noFill/>
-          <a:ln/>
-        </p:spPr>
-        <p:txBody>
-          <a:bodyPr wrap="square" lIns="0" tIns="0" rIns="0" bIns="0" rtlCol="0" anchor="ctr"/>
-          <a:lstStyle/>
-          <a:p>
-            <a:pPr indent="0" marL="0">
-              <a:buNone/>
-            </a:pPr>
-            <a:r>
-              <a:rPr lang="en-US" sz="950" dirty="0">
-                <a:solidFill>
-                  <a:srgbClr val="1C4644"/>
-                </a:solidFill>
-                <a:latin typeface="Calibri" pitchFamily="34" charset="0"/>
-                <a:ea typeface="Calibri" pitchFamily="34" charset="-122"/>
-                <a:cs typeface="Calibri" pitchFamily="34" charset="-120"/>
-              </a:rPr>
-              <a:t>Caja de tornillos</a:t>
-            </a:r>
-            <a:endParaRPr lang="en-US" sz="950" dirty="0"/>
-          </a:p>
-        </p:txBody>
-      </p:sp>
-      <p:sp>
-        <p:nvSpPr>
-          <p:cNvPr id="23" name="Shape 21"/>
-          <p:cNvSpPr/>
-          <p:nvPr/>
-        </p:nvSpPr>
-        <p:spPr>
-          <a:xfrm>
-            <a:off x="6272784" y="3739896"/>
-            <a:ext cx="1399032" cy="402336"/>
-          </a:xfrm>
-          <a:prstGeom prst="roundRect">
-            <a:avLst>
-              <a:gd name="adj" fmla="val 13636"/>
-            </a:avLst>
-          </a:prstGeom>
-          <a:solidFill>
-            <a:srgbClr val="E3EDEA"/>
-          </a:solidFill>
-          <a:ln w="6350">
-            <a:solidFill>
-              <a:srgbClr val="E3EDEA"/>
-            </a:solidFill>
-            <a:prstDash val="solid"/>
-          </a:ln>
-        </p:spPr>
-      </p:sp>
-      <p:sp>
-        <p:nvSpPr>
-          <p:cNvPr id="24" name="Text 22"/>
-          <p:cNvSpPr/>
-          <p:nvPr/>
-        </p:nvSpPr>
-        <p:spPr>
-          <a:xfrm>
-            <a:off x="6382512" y="3739896"/>
-            <a:ext cx="1179576" cy="402336"/>
-          </a:xfrm>
-          <a:prstGeom prst="rect">
-            <a:avLst/>
-          </a:prstGeom>
-          <a:noFill/>
-          <a:ln/>
-        </p:spPr>
-        <p:txBody>
-          <a:bodyPr wrap="square" lIns="0" tIns="0" rIns="0" bIns="0" rtlCol="0" anchor="ctr"/>
-          <a:lstStyle/>
-          <a:p>
-            <a:pPr indent="0" marL="0">
-              <a:buNone/>
-            </a:pPr>
-            <a:r>
-              <a:rPr lang="en-US" sz="950" dirty="0">
-                <a:solidFill>
-                  <a:srgbClr val="1C4644"/>
-                </a:solidFill>
-                <a:latin typeface="Calibri" pitchFamily="34" charset="0"/>
-                <a:ea typeface="Calibri" pitchFamily="34" charset="-122"/>
-                <a:cs typeface="Calibri" pitchFamily="34" charset="-120"/>
-              </a:rPr>
-              <a:t>Bicicleta</a:t>
-            </a:r>
-            <a:endParaRPr lang="en-US" sz="950" dirty="0"/>
-          </a:p>
-        </p:txBody>
-      </p:sp>
-      <p:sp>
-        <p:nvSpPr>
-          <p:cNvPr id="25" name="Shape 23"/>
-          <p:cNvSpPr/>
-          <p:nvPr/>
-        </p:nvSpPr>
-        <p:spPr>
-          <a:xfrm>
-            <a:off x="6272784" y="4242816"/>
-            <a:ext cx="1399032" cy="402336"/>
-          </a:xfrm>
-          <a:prstGeom prst="roundRect">
-            <a:avLst>
-              <a:gd name="adj" fmla="val 13636"/>
-            </a:avLst>
-          </a:prstGeom>
-          <a:solidFill>
-            <a:srgbClr val="E3EDEA"/>
-          </a:solidFill>
-          <a:ln w="6350">
-            <a:solidFill>
-              <a:srgbClr val="E3EDEA"/>
-            </a:solidFill>
-            <a:prstDash val="solid"/>
-          </a:ln>
-        </p:spPr>
-      </p:sp>
-      <p:sp>
-        <p:nvSpPr>
-          <p:cNvPr id="26" name="Text 24"/>
-          <p:cNvSpPr/>
-          <p:nvPr/>
-        </p:nvSpPr>
-        <p:spPr>
-          <a:xfrm>
-            <a:off x="6382512" y="4242816"/>
-            <a:ext cx="1179576" cy="402336"/>
-          </a:xfrm>
-          <a:prstGeom prst="rect">
-            <a:avLst/>
-          </a:prstGeom>
-          <a:noFill/>
-          <a:ln/>
-        </p:spPr>
-        <p:txBody>
-          <a:bodyPr wrap="square" lIns="0" tIns="0" rIns="0" bIns="0" rtlCol="0" anchor="ctr"/>
-          <a:lstStyle/>
-          <a:p>
-            <a:pPr indent="0" marL="0">
-              <a:buNone/>
-            </a:pPr>
-            <a:r>
-              <a:rPr lang="en-US" sz="950" dirty="0">
-                <a:solidFill>
-                  <a:srgbClr val="1C4644"/>
-                </a:solidFill>
-                <a:latin typeface="Calibri" pitchFamily="34" charset="0"/>
-                <a:ea typeface="Calibri" pitchFamily="34" charset="-122"/>
-                <a:cs typeface="Calibri" pitchFamily="34" charset="-120"/>
-              </a:rPr>
-              <a:t>Sombrilla</a:t>
-            </a:r>
-            <a:endParaRPr lang="en-US" sz="950" dirty="0"/>
-          </a:p>
-        </p:txBody>
-      </p:sp>
-      <p:sp>
-        <p:nvSpPr>
-          <p:cNvPr id="27" name="Text 25"/>
+      <p:pic>
+        <p:nvPicPr>
+          <p:cNvPr id="15" name="Image 0" descr="../screenshots/home-dashboard-mobile-light.png">    </p:cNvPr>
+          <p:cNvPicPr>
+            <a:picLocks noChangeAspect="1"/>
+          </p:cNvPicPr>
+          <p:nvPr/>
+        </p:nvPicPr>
+        <p:blipFill>
+          <a:blip r:embed="rId1"/>
+          <a:stretch>
+            <a:fillRect/>
+          </a:stretch>
+        </p:blipFill>
+        <p:spPr>
+          <a:xfrm>
+            <a:off x="6135624" y="1636776"/>
+            <a:ext cx="1673352" cy="3621024"/>
+          </a:xfrm>
+          <a:prstGeom prst="rect">
+            <a:avLst/>
+          </a:prstGeom>
+        </p:spPr>
+      </p:pic>
+      <p:sp>
+        <p:nvSpPr>
+          <p:cNvPr id="16" name="Text 13"/>
           <p:cNvSpPr/>
           <p:nvPr/>
         </p:nvSpPr>
@@ -5396,7 +5113,7 @@
       </p:sp>
       <p:sp>
         <p:nvSpPr>
-          <p:cNvPr id="28" name="Shape 26"/>
+          <p:cNvPr id="17" name="Shape 14"/>
           <p:cNvSpPr/>
           <p:nvPr/>
         </p:nvSpPr>
@@ -5428,471 +5145,33 @@
           </a:effectLst>
         </p:spPr>
       </p:sp>
-      <p:sp>
-        <p:nvSpPr>
-          <p:cNvPr id="29" name="Shape 27"/>
-          <p:cNvSpPr/>
-          <p:nvPr/>
-        </p:nvSpPr>
+      <p:pic>
+        <p:nvPicPr>
+          <p:cNvPr id="18" name="Image 1" descr="../screenshots/home-dashboard-desktop-light.png">    </p:cNvPr>
+          <p:cNvPicPr>
+            <a:picLocks noChangeAspect="1"/>
+          </p:cNvPicPr>
+          <p:nvPr/>
+        </p:nvPicPr>
+        <p:blipFill>
+          <a:blip r:embed="rId2"/>
+          <a:stretch>
+            <a:fillRect/>
+          </a:stretch>
+        </p:blipFill>
         <p:spPr>
           <a:xfrm>
             <a:off x="8403336" y="1609344"/>
-            <a:ext cx="3108960" cy="2194560"/>
-          </a:xfrm>
-          <a:prstGeom prst="roundRect">
-            <a:avLst>
-              <a:gd name="adj" fmla="val 1667"/>
-            </a:avLst>
-          </a:prstGeom>
-          <a:solidFill>
-            <a:srgbClr val="FFFFFF"/>
-          </a:solidFill>
-          <a:ln w="12700">
-            <a:solidFill>
-              <a:srgbClr val="D3DFDC"/>
-            </a:solidFill>
-            <a:prstDash val="solid"/>
-          </a:ln>
-        </p:spPr>
-      </p:sp>
-      <p:sp>
-        <p:nvSpPr>
-          <p:cNvPr id="30" name="Text 28"/>
-          <p:cNvSpPr/>
-          <p:nvPr/>
-        </p:nvSpPr>
-        <p:spPr>
-          <a:xfrm>
-            <a:off x="8567928" y="1737360"/>
-            <a:ext cx="1463040" cy="256032"/>
-          </a:xfrm>
-          <a:prstGeom prst="rect">
-            <a:avLst/>
-          </a:prstGeom>
-          <a:noFill/>
-          <a:ln/>
-        </p:spPr>
-        <p:txBody>
-          <a:bodyPr wrap="square" lIns="0" tIns="0" rIns="0" bIns="0" rtlCol="0" anchor="ctr"/>
-          <a:lstStyle/>
-          <a:p>
-            <a:pPr indent="0" marL="0">
-              <a:buNone/>
-            </a:pPr>
-            <a:r>
-              <a:rPr lang="en-US" sz="1050" b="1" dirty="0">
-                <a:solidFill>
-                  <a:srgbClr val="12312F"/>
-                </a:solidFill>
-                <a:latin typeface="Calibri" pitchFamily="34" charset="0"/>
-                <a:ea typeface="Calibri" pitchFamily="34" charset="-122"/>
-                <a:cs typeface="Calibri" pitchFamily="34" charset="-120"/>
-              </a:rPr>
-              <a:t>Trastero</a:t>
-            </a:r>
-            <a:endParaRPr lang="en-US" sz="1050" dirty="0"/>
-          </a:p>
-        </p:txBody>
-      </p:sp>
-      <p:sp>
-        <p:nvSpPr>
-          <p:cNvPr id="31" name="Shape 29"/>
-          <p:cNvSpPr/>
-          <p:nvPr/>
-        </p:nvSpPr>
-        <p:spPr>
-          <a:xfrm>
-            <a:off x="8567928" y="2103120"/>
-            <a:ext cx="1316736" cy="402336"/>
-          </a:xfrm>
-          <a:prstGeom prst="roundRect">
-            <a:avLst>
-              <a:gd name="adj" fmla="val 13636"/>
-            </a:avLst>
-          </a:prstGeom>
-          <a:solidFill>
-            <a:srgbClr val="E3EDEA"/>
-          </a:solidFill>
-          <a:ln w="6350">
-            <a:solidFill>
-              <a:srgbClr val="E3EDEA"/>
-            </a:solidFill>
-            <a:prstDash val="solid"/>
-          </a:ln>
-        </p:spPr>
-      </p:sp>
-      <p:sp>
-        <p:nvSpPr>
-          <p:cNvPr id="32" name="Text 30"/>
-          <p:cNvSpPr/>
-          <p:nvPr/>
-        </p:nvSpPr>
-        <p:spPr>
-          <a:xfrm>
-            <a:off x="8677656" y="2103120"/>
-            <a:ext cx="1097280" cy="402336"/>
-          </a:xfrm>
-          <a:prstGeom prst="rect">
-            <a:avLst/>
-          </a:prstGeom>
-          <a:noFill/>
-          <a:ln/>
-        </p:spPr>
-        <p:txBody>
-          <a:bodyPr wrap="square" lIns="0" tIns="0" rIns="0" bIns="0" rtlCol="0" anchor="ctr"/>
-          <a:lstStyle/>
-          <a:p>
-            <a:pPr indent="0" marL="0">
-              <a:buNone/>
-            </a:pPr>
-            <a:r>
-              <a:rPr lang="en-US" sz="900" dirty="0">
-                <a:solidFill>
-                  <a:srgbClr val="1C4644"/>
-                </a:solidFill>
-                <a:latin typeface="Calibri" pitchFamily="34" charset="0"/>
-                <a:ea typeface="Calibri" pitchFamily="34" charset="-122"/>
-                <a:cs typeface="Calibri" pitchFamily="34" charset="-120"/>
-              </a:rPr>
-              <a:t>Taladro</a:t>
-            </a:r>
-            <a:endParaRPr lang="en-US" sz="900" dirty="0"/>
-          </a:p>
-        </p:txBody>
-      </p:sp>
-      <p:sp>
-        <p:nvSpPr>
-          <p:cNvPr id="33" name="Shape 31"/>
-          <p:cNvSpPr/>
-          <p:nvPr/>
-        </p:nvSpPr>
-        <p:spPr>
-          <a:xfrm>
-            <a:off x="9994392" y="2103120"/>
-            <a:ext cx="1316736" cy="402336"/>
-          </a:xfrm>
-          <a:prstGeom prst="roundRect">
-            <a:avLst>
-              <a:gd name="adj" fmla="val 13636"/>
-            </a:avLst>
-          </a:prstGeom>
-          <a:solidFill>
-            <a:srgbClr val="E3EDEA"/>
-          </a:solidFill>
-          <a:ln w="6350">
-            <a:solidFill>
-              <a:srgbClr val="E3EDEA"/>
-            </a:solidFill>
-            <a:prstDash val="solid"/>
-          </a:ln>
-        </p:spPr>
-      </p:sp>
-      <p:sp>
-        <p:nvSpPr>
-          <p:cNvPr id="34" name="Text 32"/>
-          <p:cNvSpPr/>
-          <p:nvPr/>
-        </p:nvSpPr>
-        <p:spPr>
-          <a:xfrm>
-            <a:off x="10104120" y="2103120"/>
-            <a:ext cx="1097280" cy="402336"/>
-          </a:xfrm>
-          <a:prstGeom prst="rect">
-            <a:avLst/>
-          </a:prstGeom>
-          <a:noFill/>
-          <a:ln/>
-        </p:spPr>
-        <p:txBody>
-          <a:bodyPr wrap="square" lIns="0" tIns="0" rIns="0" bIns="0" rtlCol="0" anchor="ctr"/>
-          <a:lstStyle/>
-          <a:p>
-            <a:pPr indent="0" marL="0">
-              <a:buNone/>
-            </a:pPr>
-            <a:r>
-              <a:rPr lang="en-US" sz="900" dirty="0">
-                <a:solidFill>
-                  <a:srgbClr val="1C4644"/>
-                </a:solidFill>
-                <a:latin typeface="Calibri" pitchFamily="34" charset="0"/>
-                <a:ea typeface="Calibri" pitchFamily="34" charset="-122"/>
-                <a:cs typeface="Calibri" pitchFamily="34" charset="-120"/>
-              </a:rPr>
-              <a:t>Escalera</a:t>
-            </a:r>
-            <a:endParaRPr lang="en-US" sz="900" dirty="0"/>
-          </a:p>
-        </p:txBody>
-      </p:sp>
-      <p:sp>
-        <p:nvSpPr>
-          <p:cNvPr id="35" name="Shape 33"/>
-          <p:cNvSpPr/>
-          <p:nvPr/>
-        </p:nvSpPr>
-        <p:spPr>
-          <a:xfrm>
-            <a:off x="8567928" y="2606040"/>
-            <a:ext cx="1316736" cy="402336"/>
-          </a:xfrm>
-          <a:prstGeom prst="roundRect">
-            <a:avLst>
-              <a:gd name="adj" fmla="val 13636"/>
-            </a:avLst>
-          </a:prstGeom>
-          <a:solidFill>
-            <a:srgbClr val="E3EDEA"/>
-          </a:solidFill>
-          <a:ln w="6350">
-            <a:solidFill>
-              <a:srgbClr val="E3EDEA"/>
-            </a:solidFill>
-            <a:prstDash val="solid"/>
-          </a:ln>
-        </p:spPr>
-      </p:sp>
-      <p:sp>
-        <p:nvSpPr>
-          <p:cNvPr id="36" name="Text 34"/>
-          <p:cNvSpPr/>
-          <p:nvPr/>
-        </p:nvSpPr>
-        <p:spPr>
-          <a:xfrm>
-            <a:off x="8677656" y="2606040"/>
-            <a:ext cx="1097280" cy="402336"/>
-          </a:xfrm>
-          <a:prstGeom prst="rect">
-            <a:avLst/>
-          </a:prstGeom>
-          <a:noFill/>
-          <a:ln/>
-        </p:spPr>
-        <p:txBody>
-          <a:bodyPr wrap="square" lIns="0" tIns="0" rIns="0" bIns="0" rtlCol="0" anchor="ctr"/>
-          <a:lstStyle/>
-          <a:p>
-            <a:pPr indent="0" marL="0">
-              <a:buNone/>
-            </a:pPr>
-            <a:r>
-              <a:rPr lang="en-US" sz="900" dirty="0">
-                <a:solidFill>
-                  <a:srgbClr val="1C4644"/>
-                </a:solidFill>
-                <a:latin typeface="Calibri" pitchFamily="34" charset="0"/>
-                <a:ea typeface="Calibri" pitchFamily="34" charset="-122"/>
-                <a:cs typeface="Calibri" pitchFamily="34" charset="-120"/>
-              </a:rPr>
-              <a:t>Caja de tornillos</a:t>
-            </a:r>
-            <a:endParaRPr lang="en-US" sz="900" dirty="0"/>
-          </a:p>
-        </p:txBody>
-      </p:sp>
-      <p:sp>
-        <p:nvSpPr>
-          <p:cNvPr id="37" name="Shape 35"/>
-          <p:cNvSpPr/>
-          <p:nvPr/>
-        </p:nvSpPr>
-        <p:spPr>
-          <a:xfrm>
-            <a:off x="9994392" y="2606040"/>
-            <a:ext cx="1316736" cy="402336"/>
-          </a:xfrm>
-          <a:prstGeom prst="roundRect">
-            <a:avLst>
-              <a:gd name="adj" fmla="val 13636"/>
-            </a:avLst>
-          </a:prstGeom>
-          <a:solidFill>
-            <a:srgbClr val="E3EDEA"/>
-          </a:solidFill>
-          <a:ln w="6350">
-            <a:solidFill>
-              <a:srgbClr val="E3EDEA"/>
-            </a:solidFill>
-            <a:prstDash val="solid"/>
-          </a:ln>
-        </p:spPr>
-      </p:sp>
-      <p:sp>
-        <p:nvSpPr>
-          <p:cNvPr id="38" name="Text 36"/>
-          <p:cNvSpPr/>
-          <p:nvPr/>
-        </p:nvSpPr>
-        <p:spPr>
-          <a:xfrm>
-            <a:off x="10104120" y="2606040"/>
-            <a:ext cx="1097280" cy="402336"/>
-          </a:xfrm>
-          <a:prstGeom prst="rect">
-            <a:avLst/>
-          </a:prstGeom>
-          <a:noFill/>
-          <a:ln/>
-        </p:spPr>
-        <p:txBody>
-          <a:bodyPr wrap="square" lIns="0" tIns="0" rIns="0" bIns="0" rtlCol="0" anchor="ctr"/>
-          <a:lstStyle/>
-          <a:p>
-            <a:pPr indent="0" marL="0">
-              <a:buNone/>
-            </a:pPr>
-            <a:r>
-              <a:rPr lang="en-US" sz="900" dirty="0">
-                <a:solidFill>
-                  <a:srgbClr val="1C4644"/>
-                </a:solidFill>
-                <a:latin typeface="Calibri" pitchFamily="34" charset="0"/>
-                <a:ea typeface="Calibri" pitchFamily="34" charset="-122"/>
-                <a:cs typeface="Calibri" pitchFamily="34" charset="-120"/>
-              </a:rPr>
-              <a:t>Bicicleta</a:t>
-            </a:r>
-            <a:endParaRPr lang="en-US" sz="900" dirty="0"/>
-          </a:p>
-        </p:txBody>
-      </p:sp>
-      <p:sp>
-        <p:nvSpPr>
-          <p:cNvPr id="39" name="Shape 37"/>
-          <p:cNvSpPr/>
-          <p:nvPr/>
-        </p:nvSpPr>
-        <p:spPr>
-          <a:xfrm>
-            <a:off x="8567928" y="3108960"/>
-            <a:ext cx="1316736" cy="402336"/>
-          </a:xfrm>
-          <a:prstGeom prst="roundRect">
-            <a:avLst>
-              <a:gd name="adj" fmla="val 13636"/>
-            </a:avLst>
-          </a:prstGeom>
-          <a:solidFill>
-            <a:srgbClr val="E3EDEA"/>
-          </a:solidFill>
-          <a:ln w="6350">
-            <a:solidFill>
-              <a:srgbClr val="E3EDEA"/>
-            </a:solidFill>
-            <a:prstDash val="solid"/>
-          </a:ln>
-        </p:spPr>
-      </p:sp>
-      <p:sp>
-        <p:nvSpPr>
-          <p:cNvPr id="40" name="Text 38"/>
-          <p:cNvSpPr/>
-          <p:nvPr/>
-        </p:nvSpPr>
-        <p:spPr>
-          <a:xfrm>
-            <a:off x="8677656" y="3108960"/>
-            <a:ext cx="1097280" cy="402336"/>
-          </a:xfrm>
-          <a:prstGeom prst="rect">
-            <a:avLst/>
-          </a:prstGeom>
-          <a:noFill/>
-          <a:ln/>
-        </p:spPr>
-        <p:txBody>
-          <a:bodyPr wrap="square" lIns="0" tIns="0" rIns="0" bIns="0" rtlCol="0" anchor="ctr"/>
-          <a:lstStyle/>
-          <a:p>
-            <a:pPr indent="0" marL="0">
-              <a:buNone/>
-            </a:pPr>
-            <a:r>
-              <a:rPr lang="en-US" sz="900" dirty="0">
-                <a:solidFill>
-                  <a:srgbClr val="1C4644"/>
-                </a:solidFill>
-                <a:latin typeface="Calibri" pitchFamily="34" charset="0"/>
-                <a:ea typeface="Calibri" pitchFamily="34" charset="-122"/>
-                <a:cs typeface="Calibri" pitchFamily="34" charset="-120"/>
-              </a:rPr>
-              <a:t>Sombrilla</a:t>
-            </a:r>
-            <a:endParaRPr lang="en-US" sz="900" dirty="0"/>
-          </a:p>
-        </p:txBody>
-      </p:sp>
-      <p:sp>
-        <p:nvSpPr>
-          <p:cNvPr id="41" name="Shape 39"/>
-          <p:cNvSpPr/>
-          <p:nvPr/>
-        </p:nvSpPr>
-        <p:spPr>
-          <a:xfrm>
-            <a:off x="9994392" y="3108960"/>
-            <a:ext cx="1316736" cy="402336"/>
-          </a:xfrm>
-          <a:prstGeom prst="roundRect">
-            <a:avLst>
-              <a:gd name="adj" fmla="val 13636"/>
-            </a:avLst>
-          </a:prstGeom>
-          <a:solidFill>
-            <a:srgbClr val="E3EDEA"/>
-          </a:solidFill>
-          <a:ln w="6350">
-            <a:solidFill>
-              <a:srgbClr val="E3EDEA"/>
-            </a:solidFill>
-            <a:prstDash val="solid"/>
-          </a:ln>
-        </p:spPr>
-      </p:sp>
-      <p:sp>
-        <p:nvSpPr>
-          <p:cNvPr id="42" name="Text 40"/>
-          <p:cNvSpPr/>
-          <p:nvPr/>
-        </p:nvSpPr>
-        <p:spPr>
-          <a:xfrm>
-            <a:off x="10104120" y="3108960"/>
-            <a:ext cx="1097280" cy="402336"/>
-          </a:xfrm>
-          <a:prstGeom prst="rect">
-            <a:avLst/>
-          </a:prstGeom>
-          <a:noFill/>
-          <a:ln/>
-        </p:spPr>
-        <p:txBody>
-          <a:bodyPr wrap="square" lIns="0" tIns="0" rIns="0" bIns="0" rtlCol="0" anchor="ctr"/>
-          <a:lstStyle/>
-          <a:p>
-            <a:pPr indent="0" marL="0">
-              <a:buNone/>
-            </a:pPr>
-            <a:r>
-              <a:rPr lang="en-US" sz="900" dirty="0">
-                <a:solidFill>
-                  <a:srgbClr val="1C4644"/>
-                </a:solidFill>
-                <a:latin typeface="Calibri" pitchFamily="34" charset="0"/>
-                <a:ea typeface="Calibri" pitchFamily="34" charset="-122"/>
-                <a:cs typeface="Calibri" pitchFamily="34" charset="-120"/>
-              </a:rPr>
-              <a:t>Manguera</a:t>
-            </a:r>
-            <a:endParaRPr lang="en-US" sz="900" dirty="0"/>
-          </a:p>
-        </p:txBody>
-      </p:sp>
-      <p:sp>
-        <p:nvSpPr>
-          <p:cNvPr id="43" name="Shape 41"/>
+            <a:ext cx="3108960" cy="2185416"/>
+          </a:xfrm>
+          <a:prstGeom prst="rect">
+            <a:avLst/>
+          </a:prstGeom>
+        </p:spPr>
+      </p:pic>
+      <p:sp>
+        <p:nvSpPr>
+          <p:cNvPr id="19" name="Shape 15"/>
           <p:cNvSpPr/>
           <p:nvPr/>
         </p:nvSpPr>
@@ -5917,7 +5196,7 @@
       </p:sp>
       <p:sp>
         <p:nvSpPr>
-          <p:cNvPr id="44" name="Text 42"/>
+          <p:cNvPr id="20" name="Text 16"/>
           <p:cNvSpPr/>
           <p:nvPr/>
         </p:nvSpPr>
@@ -5956,7 +5235,7 @@
       </p:sp>
       <p:sp>
         <p:nvSpPr>
-          <p:cNvPr id="45" name="Shape 43"/>
+          <p:cNvPr id="21" name="Shape 17"/>
           <p:cNvSpPr/>
           <p:nvPr/>
         </p:nvSpPr>
@@ -5983,7 +5262,7 @@
       </p:sp>
       <p:sp>
         <p:nvSpPr>
-          <p:cNvPr id="46" name="Text 44"/>
+          <p:cNvPr id="22" name="Text 18"/>
           <p:cNvSpPr/>
           <p:nvPr/>
         </p:nvSpPr>
@@ -6025,7 +5304,7 @@
       </p:sp>
       <p:sp>
         <p:nvSpPr>
-          <p:cNvPr id="47" name="Text 45"/>
+          <p:cNvPr id="23" name="Text 19"/>
           <p:cNvSpPr/>
           <p:nvPr/>
         </p:nvSpPr>
@@ -6064,7 +5343,7 @@
       </p:sp>
       <p:sp>
         <p:nvSpPr>
-          <p:cNvPr id="48" name="Text 46"/>
+          <p:cNvPr id="24" name="Text 20"/>
           <p:cNvSpPr/>
           <p:nvPr/>
         </p:nvSpPr>
@@ -6166,6 +5445,610 @@
                 <a:ea typeface="Calibri" pitchFamily="34" charset="-122"/>
                 <a:cs typeface="Calibri" pitchFamily="34" charset="-120"/>
               </a:rPr>
+              <a:t>ASÍ SE VE</a:t>
+            </a:r>
+            <a:endParaRPr lang="en-US" sz="1100" dirty="0"/>
+          </a:p>
+        </p:txBody>
+      </p:sp>
+      <p:sp>
+        <p:nvSpPr>
+          <p:cNvPr id="3" name="Text 1"/>
+          <p:cNvSpPr/>
+          <p:nvPr/>
+        </p:nvSpPr>
+        <p:spPr>
+          <a:xfrm>
+            <a:off x="548640" y="658368"/>
+            <a:ext cx="11094415" cy="566928"/>
+          </a:xfrm>
+          <a:prstGeom prst="rect">
+            <a:avLst/>
+          </a:prstGeom>
+          <a:noFill/>
+          <a:ln/>
+        </p:spPr>
+        <p:txBody>
+          <a:bodyPr wrap="square" lIns="0" tIns="0" rIns="0" bIns="0" rtlCol="0" anchor="ctr"/>
+          <a:lstStyle/>
+          <a:p>
+            <a:pPr algn="l" indent="0" marL="0">
+              <a:buNone/>
+            </a:pPr>
+            <a:r>
+              <a:rPr lang="en-US" sz="3200" b="1" dirty="0">
+                <a:solidFill>
+                  <a:srgbClr val="12312F"/>
+                </a:solidFill>
+                <a:latin typeface="Cambria" pitchFamily="34" charset="0"/>
+                <a:ea typeface="Cambria" pitchFamily="34" charset="-122"/>
+                <a:cs typeface="Cambria" pitchFamily="34" charset="-120"/>
+              </a:rPr>
+              <a:t>Capturas reales, no maquetas</a:t>
+            </a:r>
+            <a:endParaRPr lang="en-US" sz="3200" dirty="0"/>
+          </a:p>
+        </p:txBody>
+      </p:sp>
+      <p:sp>
+        <p:nvSpPr>
+          <p:cNvPr id="4" name="Shape 2"/>
+          <p:cNvSpPr/>
+          <p:nvPr/>
+        </p:nvSpPr>
+        <p:spPr>
+          <a:xfrm>
+            <a:off x="548640" y="1600200"/>
+            <a:ext cx="5943600" cy="4160520"/>
+          </a:xfrm>
+          <a:prstGeom prst="roundRect">
+            <a:avLst>
+              <a:gd name="adj" fmla="val 2198"/>
+            </a:avLst>
+          </a:prstGeom>
+          <a:solidFill>
+            <a:srgbClr val="12312F"/>
+          </a:solidFill>
+          <a:ln w="6350">
+            <a:solidFill>
+              <a:srgbClr val="12312F"/>
+            </a:solidFill>
+            <a:prstDash val="solid"/>
+          </a:ln>
+          <a:effectLst>
+            <a:outerShdw sx="100000" sy="100000" kx="0" ky="0" algn="bl" rotWithShape="0" blurRad="127000" dist="25400" dir="5400000">
+              <a:srgbClr val="0B1F1E">
+                <a:alpha val="10000"/>
+              </a:srgbClr>
+            </a:outerShdw>
+          </a:effectLst>
+        </p:spPr>
+      </p:sp>
+      <p:pic>
+        <p:nvPicPr>
+          <p:cNvPr id="5" name="Image 0" descr="../screenshots/shopping-list-desktop-light.png">    </p:cNvPr>
+          <p:cNvPicPr>
+            <a:picLocks noChangeAspect="1"/>
+          </p:cNvPicPr>
+          <p:nvPr/>
+        </p:nvPicPr>
+        <p:blipFill>
+          <a:blip r:embed="rId1"/>
+          <a:stretch>
+            <a:fillRect/>
+          </a:stretch>
+        </p:blipFill>
+        <p:spPr>
+          <a:xfrm>
+            <a:off x="749808" y="1737360"/>
+            <a:ext cx="5532120" cy="3886200"/>
+          </a:xfrm>
+          <a:prstGeom prst="rect">
+            <a:avLst/>
+          </a:prstGeom>
+        </p:spPr>
+      </p:pic>
+      <p:sp>
+        <p:nvSpPr>
+          <p:cNvPr id="6" name="Text 3"/>
+          <p:cNvSpPr/>
+          <p:nvPr/>
+        </p:nvSpPr>
+        <p:spPr>
+          <a:xfrm>
+            <a:off x="548640" y="5870448"/>
+            <a:ext cx="5943600" cy="320040"/>
+          </a:xfrm>
+          <a:prstGeom prst="rect">
+            <a:avLst/>
+          </a:prstGeom>
+          <a:noFill/>
+          <a:ln/>
+        </p:spPr>
+        <p:txBody>
+          <a:bodyPr wrap="square" lIns="0" tIns="0" rIns="0" bIns="0" rtlCol="0" anchor="ctr"/>
+          <a:lstStyle/>
+          <a:p>
+            <a:pPr algn="ctr" indent="0" marL="0">
+              <a:buNone/>
+            </a:pPr>
+            <a:r>
+              <a:rPr lang="en-US" sz="1100" dirty="0">
+                <a:solidFill>
+                  <a:srgbClr val="5F706E"/>
+                </a:solidFill>
+                <a:latin typeface="Calibri" pitchFamily="34" charset="0"/>
+                <a:ea typeface="Calibri" pitchFamily="34" charset="-122"/>
+                <a:cs typeface="Calibri" pitchFamily="34" charset="-120"/>
+              </a:rPr>
+              <a:t>«Compras»: lo que falta en casa, agrupado para ir a comprar y marcado al volver.</a:t>
+            </a:r>
+            <a:endParaRPr lang="en-US" sz="1100" dirty="0"/>
+          </a:p>
+        </p:txBody>
+      </p:sp>
+      <p:sp>
+        <p:nvSpPr>
+          <p:cNvPr id="7" name="Shape 4"/>
+          <p:cNvSpPr/>
+          <p:nvPr/>
+        </p:nvSpPr>
+        <p:spPr>
+          <a:xfrm>
+            <a:off x="6400800" y="1600200"/>
+            <a:ext cx="2057400" cy="4160520"/>
+          </a:xfrm>
+          <a:prstGeom prst="roundRect">
+            <a:avLst>
+              <a:gd name="adj" fmla="val 8889"/>
+            </a:avLst>
+          </a:prstGeom>
+          <a:solidFill>
+            <a:srgbClr val="12312F"/>
+          </a:solidFill>
+          <a:ln w="6350">
+            <a:solidFill>
+              <a:srgbClr val="12312F"/>
+            </a:solidFill>
+            <a:prstDash val="solid"/>
+          </a:ln>
+          <a:effectLst>
+            <a:outerShdw sx="100000" sy="100000" kx="0" ky="0" algn="bl" rotWithShape="0" blurRad="127000" dist="25400" dir="5400000">
+              <a:srgbClr val="0B1F1E">
+                <a:alpha val="10000"/>
+              </a:srgbClr>
+            </a:outerShdw>
+          </a:effectLst>
+        </p:spPr>
+      </p:sp>
+      <p:pic>
+        <p:nvPicPr>
+          <p:cNvPr id="8" name="Image 1" descr="../screenshots/more-menu-mobile-light.png">    </p:cNvPr>
+          <p:cNvPicPr>
+            <a:picLocks noChangeAspect="1"/>
+          </p:cNvPicPr>
+          <p:nvPr/>
+        </p:nvPicPr>
+        <p:blipFill>
+          <a:blip r:embed="rId2"/>
+          <a:stretch>
+            <a:fillRect/>
+          </a:stretch>
+        </p:blipFill>
+        <p:spPr>
+          <a:xfrm>
+            <a:off x="6537960" y="1746504"/>
+            <a:ext cx="1792224" cy="3867912"/>
+          </a:xfrm>
+          <a:prstGeom prst="rect">
+            <a:avLst/>
+          </a:prstGeom>
+        </p:spPr>
+      </p:pic>
+      <p:sp>
+        <p:nvSpPr>
+          <p:cNvPr id="9" name="Text 5"/>
+          <p:cNvSpPr/>
+          <p:nvPr/>
+        </p:nvSpPr>
+        <p:spPr>
+          <a:xfrm>
+            <a:off x="6400800" y="5870448"/>
+            <a:ext cx="2057400" cy="320040"/>
+          </a:xfrm>
+          <a:prstGeom prst="rect">
+            <a:avLst/>
+          </a:prstGeom>
+          <a:noFill/>
+          <a:ln/>
+        </p:spPr>
+        <p:txBody>
+          <a:bodyPr wrap="square" lIns="0" tIns="0" rIns="0" bIns="0" rtlCol="0" anchor="ctr"/>
+          <a:lstStyle/>
+          <a:p>
+            <a:pPr algn="ctr" indent="0" marL="0">
+              <a:buNone/>
+            </a:pPr>
+            <a:r>
+              <a:rPr lang="en-US" sz="1100" dirty="0">
+                <a:solidFill>
+                  <a:srgbClr val="5F706E"/>
+                </a:solidFill>
+                <a:latin typeface="Calibri" pitchFamily="34" charset="0"/>
+                <a:ea typeface="Calibri" pitchFamily="34" charset="-122"/>
+                <a:cs typeface="Calibri" pitchFamily="34" charset="-120"/>
+              </a:rPr>
+              <a:t>El menú «Más» del móvil</a:t>
+            </a:r>
+            <a:endParaRPr lang="en-US" sz="1100" dirty="0"/>
+          </a:p>
+        </p:txBody>
+      </p:sp>
+      <p:sp>
+        <p:nvSpPr>
+          <p:cNvPr id="10" name="Shape 6"/>
+          <p:cNvSpPr/>
+          <p:nvPr/>
+        </p:nvSpPr>
+        <p:spPr>
+          <a:xfrm>
+            <a:off x="8796528" y="1600200"/>
+            <a:ext cx="2846527" cy="1965960"/>
+          </a:xfrm>
+          <a:prstGeom prst="roundRect">
+            <a:avLst>
+              <a:gd name="adj" fmla="val 4186"/>
+            </a:avLst>
+          </a:prstGeom>
+          <a:solidFill>
+            <a:srgbClr val="EFF4F2"/>
+          </a:solidFill>
+          <a:ln w="6350">
+            <a:solidFill>
+              <a:srgbClr val="EFF4F2"/>
+            </a:solidFill>
+            <a:prstDash val="solid"/>
+          </a:ln>
+        </p:spPr>
+      </p:sp>
+      <p:sp>
+        <p:nvSpPr>
+          <p:cNvPr id="11" name="Text 7"/>
+          <p:cNvSpPr/>
+          <p:nvPr/>
+        </p:nvSpPr>
+        <p:spPr>
+          <a:xfrm>
+            <a:off x="9052560" y="1783080"/>
+            <a:ext cx="2334463" cy="548640"/>
+          </a:xfrm>
+          <a:prstGeom prst="rect">
+            <a:avLst/>
+          </a:prstGeom>
+          <a:noFill/>
+          <a:ln/>
+        </p:spPr>
+        <p:txBody>
+          <a:bodyPr wrap="square" lIns="0" tIns="0" rIns="0" bIns="0" rtlCol="0" anchor="t"/>
+          <a:lstStyle/>
+          <a:p>
+            <a:pPr indent="0" marL="0">
+              <a:lnSpc>
+                <a:spcPts val="2100"/>
+              </a:lnSpc>
+              <a:buNone/>
+            </a:pPr>
+            <a:r>
+              <a:rPr lang="en-US" sz="1600" b="1" dirty="0">
+                <a:solidFill>
+                  <a:srgbClr val="12312F"/>
+                </a:solidFill>
+                <a:latin typeface="Cambria" pitchFamily="34" charset="0"/>
+                <a:ea typeface="Cambria" pitchFamily="34" charset="-122"/>
+                <a:cs typeface="Cambria" pitchFamily="34" charset="-120"/>
+              </a:rPr>
+              <a:t>Lo que se ve es lo que hay</a:t>
+            </a:r>
+            <a:endParaRPr lang="en-US" sz="1600" dirty="0"/>
+          </a:p>
+        </p:txBody>
+      </p:sp>
+      <p:sp>
+        <p:nvSpPr>
+          <p:cNvPr id="12" name="Text 8"/>
+          <p:cNvSpPr/>
+          <p:nvPr/>
+        </p:nvSpPr>
+        <p:spPr>
+          <a:xfrm>
+            <a:off x="9052560" y="2377440"/>
+            <a:ext cx="2334463" cy="1097280"/>
+          </a:xfrm>
+          <a:prstGeom prst="rect">
+            <a:avLst/>
+          </a:prstGeom>
+          <a:noFill/>
+          <a:ln/>
+        </p:spPr>
+        <p:txBody>
+          <a:bodyPr wrap="square" lIns="0" tIns="0" rIns="0" bIns="0" rtlCol="0" anchor="t"/>
+          <a:lstStyle/>
+          <a:p>
+            <a:pPr indent="0" marL="0">
+              <a:lnSpc>
+                <a:spcPts val="1600"/>
+              </a:lnSpc>
+              <a:buNone/>
+            </a:pPr>
+            <a:r>
+              <a:rPr lang="en-US" sz="1150" dirty="0">
+                <a:solidFill>
+                  <a:srgbClr val="5F706E"/>
+                </a:solidFill>
+                <a:latin typeface="Calibri" pitchFamily="34" charset="0"/>
+                <a:ea typeface="Calibri" pitchFamily="34" charset="-122"/>
+                <a:cs typeface="Calibri" pitchFamily="34" charset="-120"/>
+              </a:rPr>
+              <a:t>Capturas del 21 de agosto de 2026, de la instancia en producción. El hogar es el de demostración: catorce meses de histórico para poder enseñar.</a:t>
+            </a:r>
+            <a:endParaRPr lang="en-US" sz="1150" dirty="0"/>
+          </a:p>
+        </p:txBody>
+      </p:sp>
+      <p:sp>
+        <p:nvSpPr>
+          <p:cNvPr id="13" name="Shape 9"/>
+          <p:cNvSpPr/>
+          <p:nvPr/>
+        </p:nvSpPr>
+        <p:spPr>
+          <a:xfrm>
+            <a:off x="8796528" y="3794760"/>
+            <a:ext cx="2846527" cy="1965960"/>
+          </a:xfrm>
+          <a:prstGeom prst="roundRect">
+            <a:avLst>
+              <a:gd name="adj" fmla="val 4186"/>
+            </a:avLst>
+          </a:prstGeom>
+          <a:solidFill>
+            <a:srgbClr val="E3EDEA"/>
+          </a:solidFill>
+          <a:ln w="6350">
+            <a:solidFill>
+              <a:srgbClr val="E3EDEA"/>
+            </a:solidFill>
+            <a:prstDash val="solid"/>
+          </a:ln>
+        </p:spPr>
+      </p:sp>
+      <p:sp>
+        <p:nvSpPr>
+          <p:cNvPr id="14" name="Text 10"/>
+          <p:cNvSpPr/>
+          <p:nvPr/>
+        </p:nvSpPr>
+        <p:spPr>
+          <a:xfrm>
+            <a:off x="9052560" y="3977640"/>
+            <a:ext cx="2334463" cy="548640"/>
+          </a:xfrm>
+          <a:prstGeom prst="rect">
+            <a:avLst/>
+          </a:prstGeom>
+          <a:noFill/>
+          <a:ln/>
+        </p:spPr>
+        <p:txBody>
+          <a:bodyPr wrap="square" lIns="0" tIns="0" rIns="0" bIns="0" rtlCol="0" anchor="t"/>
+          <a:lstStyle/>
+          <a:p>
+            <a:pPr indent="0" marL="0">
+              <a:lnSpc>
+                <a:spcPts val="2100"/>
+              </a:lnSpc>
+              <a:buNone/>
+            </a:pPr>
+            <a:r>
+              <a:rPr lang="en-US" sz="1600" b="1" dirty="0">
+                <a:solidFill>
+                  <a:srgbClr val="1C4644"/>
+                </a:solidFill>
+                <a:latin typeface="Cambria" pitchFamily="34" charset="0"/>
+                <a:ea typeface="Cambria" pitchFamily="34" charset="-122"/>
+                <a:cs typeface="Cambria" pitchFamily="34" charset="-120"/>
+              </a:rPr>
+              <a:t>Los dos modos, auditados</a:t>
+            </a:r>
+            <a:endParaRPr lang="en-US" sz="1600" dirty="0"/>
+          </a:p>
+        </p:txBody>
+      </p:sp>
+      <p:sp>
+        <p:nvSpPr>
+          <p:cNvPr id="15" name="Text 11"/>
+          <p:cNvSpPr/>
+          <p:nvPr/>
+        </p:nvSpPr>
+        <p:spPr>
+          <a:xfrm>
+            <a:off x="9052560" y="4572000"/>
+            <a:ext cx="2334463" cy="1097280"/>
+          </a:xfrm>
+          <a:prstGeom prst="rect">
+            <a:avLst/>
+          </a:prstGeom>
+          <a:noFill/>
+          <a:ln/>
+        </p:spPr>
+        <p:txBody>
+          <a:bodyPr wrap="square" lIns="0" tIns="0" rIns="0" bIns="0" rtlCol="0" anchor="t"/>
+          <a:lstStyle/>
+          <a:p>
+            <a:pPr indent="0" marL="0">
+              <a:lnSpc>
+                <a:spcPts val="1600"/>
+              </a:lnSpc>
+              <a:buNone/>
+            </a:pPr>
+            <a:r>
+              <a:rPr lang="en-US" sz="1150" dirty="0">
+                <a:solidFill>
+                  <a:srgbClr val="5F706E"/>
+                </a:solidFill>
+                <a:latin typeface="Calibri" pitchFamily="34" charset="0"/>
+                <a:ea typeface="Calibri" pitchFamily="34" charset="-122"/>
+                <a:cs typeface="Calibri" pitchFamily="34" charset="-120"/>
+              </a:rPr>
+              <a:t>Claro y oscuro, con el contraste comprobado en los dos: la construcción falla si un color baja del nivel AA, en lugar de descubrirse en una auditoría.</a:t>
+            </a:r>
+            <a:endParaRPr lang="en-US" sz="1150" dirty="0"/>
+          </a:p>
+        </p:txBody>
+      </p:sp>
+      <p:sp>
+        <p:nvSpPr>
+          <p:cNvPr id="16" name="Text 12"/>
+          <p:cNvSpPr/>
+          <p:nvPr/>
+        </p:nvSpPr>
+        <p:spPr>
+          <a:xfrm>
+            <a:off x="548640" y="6382512"/>
+            <a:ext cx="5486400" cy="256032"/>
+          </a:xfrm>
+          <a:prstGeom prst="rect">
+            <a:avLst/>
+          </a:prstGeom>
+          <a:noFill/>
+          <a:ln/>
+        </p:spPr>
+        <p:txBody>
+          <a:bodyPr wrap="square" lIns="0" tIns="0" rIns="0" bIns="0" rtlCol="0" anchor="ctr"/>
+          <a:lstStyle/>
+          <a:p>
+            <a:pPr indent="0" marL="0">
+              <a:buNone/>
+            </a:pPr>
+            <a:r>
+              <a:rPr lang="en-US" sz="900" dirty="0">
+                <a:solidFill>
+                  <a:srgbClr val="93A3A0"/>
+                </a:solidFill>
+                <a:latin typeface="Calibri" pitchFamily="34" charset="0"/>
+                <a:ea typeface="Calibri" pitchFamily="34" charset="-122"/>
+                <a:cs typeface="Calibri" pitchFamily="34" charset="-120"/>
+              </a:rPr>
+              <a:t>DRP · Domestic Resource Planning</a:t>
+            </a:r>
+            <a:endParaRPr lang="en-US" sz="900" dirty="0"/>
+          </a:p>
+        </p:txBody>
+      </p:sp>
+      <p:sp>
+        <p:nvSpPr>
+          <p:cNvPr id="17" name="Text 13"/>
+          <p:cNvSpPr/>
+          <p:nvPr/>
+        </p:nvSpPr>
+        <p:spPr>
+          <a:xfrm>
+            <a:off x="10545775" y="6382512"/>
+            <a:ext cx="1097280" cy="256032"/>
+          </a:xfrm>
+          <a:prstGeom prst="rect">
+            <a:avLst/>
+          </a:prstGeom>
+          <a:noFill/>
+          <a:ln/>
+        </p:spPr>
+        <p:txBody>
+          <a:bodyPr wrap="square" lIns="0" tIns="0" rIns="0" bIns="0" rtlCol="0" anchor="ctr"/>
+          <a:lstStyle/>
+          <a:p>
+            <a:pPr algn="r" indent="0" marL="0">
+              <a:buNone/>
+            </a:pPr>
+            <a:r>
+              <a:rPr lang="en-US" sz="900" dirty="0">
+                <a:solidFill>
+                  <a:srgbClr val="93A3A0"/>
+                </a:solidFill>
+                <a:latin typeface="Calibri" pitchFamily="34" charset="0"/>
+                <a:ea typeface="Calibri" pitchFamily="34" charset="-122"/>
+                <a:cs typeface="Calibri" pitchFamily="34" charset="-120"/>
+              </a:rPr>
+              <a:t>11</a:t>
+            </a:r>
+            <a:endParaRPr lang="en-US" sz="900" dirty="0"/>
+          </a:p>
+        </p:txBody>
+      </p:sp>
+    </p:spTree>
+  </p:cSld>
+  <p:clrMapOvr>
+    <a:masterClrMapping/>
+  </p:clrMapOvr>
+</p:sld>
+</file>
+
+<file path=ppt/slides/slide13.xml><?xml version="1.0" encoding="utf-8"?>
+<p:sld xmlns:a="http://schemas.openxmlformats.org/drawingml/2006/main" xmlns:r="http://schemas.openxmlformats.org/officeDocument/2006/relationships" xmlns:p="http://schemas.openxmlformats.org/presentationml/2006/main">
+  <p:cSld name="Slide 13">
+    <p:bg>
+      <p:bgPr>
+        <a:solidFill>
+          <a:srgbClr val="FFFFFF"/>
+        </a:solidFill>
+      </p:bgPr>
+    </p:bg>
+    <p:spTree>
+      <p:nvGrpSpPr>
+        <p:cNvPr id="1" name=""/>
+        <p:cNvGrpSpPr/>
+        <p:nvPr/>
+      </p:nvGrpSpPr>
+      <p:grpSpPr>
+        <a:xfrm>
+          <a:off x="0" y="0"/>
+          <a:ext cx="0" cy="0"/>
+          <a:chOff x="0" y="0"/>
+          <a:chExt cx="0" cy="0"/>
+        </a:xfrm>
+      </p:grpSpPr>
+      <p:sp>
+        <p:nvSpPr>
+          <p:cNvPr id="2" name="Text 0"/>
+          <p:cNvSpPr/>
+          <p:nvPr/>
+        </p:nvSpPr>
+        <p:spPr>
+          <a:xfrm>
+            <a:off x="548640" y="384048"/>
+            <a:ext cx="11094415" cy="237744"/>
+          </a:xfrm>
+          <a:prstGeom prst="rect">
+            <a:avLst/>
+          </a:prstGeom>
+          <a:noFill/>
+          <a:ln/>
+        </p:spPr>
+        <p:txBody>
+          <a:bodyPr wrap="square" lIns="0" tIns="0" rIns="0" bIns="0" rtlCol="0" anchor="ctr"/>
+          <a:lstStyle/>
+          <a:p>
+            <a:pPr algn="l" indent="0" marL="0">
+              <a:buNone/>
+            </a:pPr>
+            <a:r>
+              <a:rPr lang="en-US" sz="1100" b="1" spc="200" kern="0" dirty="0">
+                <a:solidFill>
+                  <a:srgbClr val="2E7B72"/>
+                </a:solidFill>
+                <a:latin typeface="Calibri" pitchFamily="34" charset="0"/>
+                <a:ea typeface="Calibri" pitchFamily="34" charset="-122"/>
+                <a:cs typeface="Calibri" pitchFamily="34" charset="-120"/>
+              </a:rPr>
               <a:t>DÓNDE ESTÁ EL PROYECTO</a:t>
             </a:r>
             <a:endParaRPr lang="en-US" sz="1100" dirty="0"/>
@@ -7345,7 +7228,7 @@
                 <a:ea typeface="Calibri" pitchFamily="34" charset="-122"/>
                 <a:cs typeface="Calibri" pitchFamily="34" charset="-120"/>
               </a:rPr>
-              <a:t>ningún servidor contratado, ningún hogar real dentro y nadie usando esto para saber dónde está el taladro. Por eso los cuatro módulos construidos siguen diciendo «en desarrollo» y no «en producción»: el código está entero, el despliegue no ha empezado.</a:t>
+              <a:t>ningún hogar real dentro. El código está entero y desde el 21 de agosto corre en un servidor real, con el hogar de demostración cargado; los cuatro módulos construidos siguen diciendo «en desarrollo» y no «en producción» porque nadie usa esto aún para saber dónde está el taladro.</a:t>
             </a:r>
             <a:endParaRPr lang="en-US" sz="1300" dirty="0"/>
           </a:p>
@@ -7423,7 +7306,7 @@
                 <a:ea typeface="Calibri" pitchFamily="34" charset="-122"/>
                 <a:cs typeface="Calibri" pitchFamily="34" charset="-120"/>
               </a:rPr>
-              <a:t>11</a:t>
+              <a:t>12</a:t>
             </a:r>
             <a:endParaRPr lang="en-US" sz="900" dirty="0"/>
           </a:p>
@@ -7437,9 +7320,9 @@
 </p:sld>
 </file>
 
-<file path=ppt/slides/slide13.xml><?xml version="1.0" encoding="utf-8"?>
+<file path=ppt/slides/slide14.xml><?xml version="1.0" encoding="utf-8"?>
 <p:sld xmlns:a="http://schemas.openxmlformats.org/drawingml/2006/main" xmlns:r="http://schemas.openxmlformats.org/officeDocument/2006/relationships" xmlns:p="http://schemas.openxmlformats.org/presentationml/2006/main">
-  <p:cSld name="Slide 13">
+  <p:cSld name="Slide 14">
     <p:bg>
       <p:bgPr>
         <a:solidFill>
@@ -7948,7 +7831,7 @@
                 <a:ea typeface="Calibri" pitchFamily="34" charset="-122"/>
                 <a:cs typeface="Calibri" pitchFamily="34" charset="-120"/>
               </a:rPr>
-              <a:t>HOGARES USÁNDOLO</a:t>
+              <a:t>HOGARES REALES DENTRO</a:t>
             </a:r>
             <a:endParaRPr lang="en-US" sz="1000" dirty="0"/>
           </a:p>
@@ -7990,7 +7873,7 @@
                 <a:ea typeface="Calibri" pitchFamily="34" charset="-122"/>
                 <a:cs typeface="Calibri" pitchFamily="34" charset="-120"/>
               </a:rPr>
-              <a:t>No hay despliegue ni servidor contratado. Es exactamente lo siguiente que este proyecto necesita.</a:t>
+              <a:t>Desplegado y esperándolos: el primer hogar piloto es exactamente lo siguiente que este proyecto necesita.</a:t>
             </a:r>
             <a:endParaRPr lang="en-US" sz="1150" dirty="0"/>
           </a:p>
@@ -8107,7 +7990,7 @@
                 <a:ea typeface="Calibri" pitchFamily="34" charset="-122"/>
                 <a:cs typeface="Calibri" pitchFamily="34" charset="-120"/>
               </a:rPr>
-              <a:t>12</a:t>
+              <a:t>13</a:t>
             </a:r>
             <a:endParaRPr lang="en-US" sz="900" dirty="0"/>
           </a:p>
@@ -8121,9 +8004,9 @@
 </p:sld>
 </file>
 
-<file path=ppt/slides/slide14.xml><?xml version="1.0" encoding="utf-8"?>
+<file path=ppt/slides/slide15.xml><?xml version="1.0" encoding="utf-8"?>
 <p:sld xmlns:a="http://schemas.openxmlformats.org/drawingml/2006/main" xmlns:r="http://schemas.openxmlformats.org/officeDocument/2006/relationships" xmlns:p="http://schemas.openxmlformats.org/presentationml/2006/main">
-  <p:cSld name="Slide 14">
+  <p:cSld name="Slide 15">
     <p:bg>
       <p:bgPr>
         <a:solidFill>
@@ -8393,7 +8276,7 @@
                 <a:ea typeface="Cambria" pitchFamily="34" charset="-122"/>
                 <a:cs typeface="Cambria" pitchFamily="34" charset="-120"/>
               </a:rPr>
-              <a:t>Un servidor donde vivir</a:t>
+              <a:t>Un dominio con su candado</a:t>
             </a:r>
             <a:endParaRPr lang="en-US" sz="1600" dirty="0"/>
           </a:p>
@@ -8435,7 +8318,7 @@
                 <a:ea typeface="Calibri" pitchFamily="34" charset="-122"/>
                 <a:cs typeface="Calibri" pitchFamily="34" charset="-120"/>
               </a:rPr>
-              <a:t>El tamaño está medido con consumo real y la máquina está elegida. Lo que no está es contratada.</a:t>
+              <a:t>El servidor ya corre. El dominio y el cifrado esperan a propósito al primer hogar que no sea de demostración.</a:t>
             </a:r>
             <a:endParaRPr lang="en-US" sz="1200" dirty="0"/>
           </a:p>
@@ -8943,7 +8826,7 @@
                 <a:ea typeface="Calibri" pitchFamily="34" charset="-122"/>
                 <a:cs typeface="Calibri" pitchFamily="34" charset="-120"/>
               </a:rPr>
-              <a:t>Para el despliegue, para sostenerlo en marcha y para el tiempo que la Fase 3 necesita.</a:t>
+              <a:t>Para sostener en marcha el servidor que ya corre y para el tiempo que la Fase 3 necesita.</a:t>
             </a:r>
             <a:endParaRPr lang="en-US" sz="1200" dirty="0"/>
           </a:p>
@@ -9345,896 +9228,6 @@
               <a:rPr lang="en-US" sz="900" dirty="0">
                 <a:solidFill>
                   <a:srgbClr val="93A3A0"/>
-                </a:solidFill>
-                <a:latin typeface="Calibri" pitchFamily="34" charset="0"/>
-                <a:ea typeface="Calibri" pitchFamily="34" charset="-122"/>
-                <a:cs typeface="Calibri" pitchFamily="34" charset="-120"/>
-              </a:rPr>
-              <a:t>13</a:t>
-            </a:r>
-            <a:endParaRPr lang="en-US" sz="900" dirty="0"/>
-          </a:p>
-        </p:txBody>
-      </p:sp>
-    </p:spTree>
-  </p:cSld>
-  <p:clrMapOvr>
-    <a:masterClrMapping/>
-  </p:clrMapOvr>
-</p:sld>
-</file>
-
-<file path=ppt/slides/slide15.xml><?xml version="1.0" encoding="utf-8"?>
-<p:sld xmlns:a="http://schemas.openxmlformats.org/drawingml/2006/main" xmlns:r="http://schemas.openxmlformats.org/officeDocument/2006/relationships" xmlns:p="http://schemas.openxmlformats.org/presentationml/2006/main">
-  <p:cSld name="Slide 15">
-    <p:bg>
-      <p:bgPr>
-        <a:solidFill>
-          <a:srgbClr val="12312F"/>
-        </a:solidFill>
-      </p:bgPr>
-    </p:bg>
-    <p:spTree>
-      <p:nvGrpSpPr>
-        <p:cNvPr id="1" name=""/>
-        <p:cNvGrpSpPr/>
-        <p:nvPr/>
-      </p:nvGrpSpPr>
-      <p:grpSpPr>
-        <a:xfrm>
-          <a:off x="0" y="0"/>
-          <a:ext cx="0" cy="0"/>
-          <a:chOff x="0" y="0"/>
-          <a:chExt cx="0" cy="0"/>
-        </a:xfrm>
-      </p:grpSpPr>
-      <p:sp>
-        <p:nvSpPr>
-          <p:cNvPr id="2" name="Text 0"/>
-          <p:cNvSpPr/>
-          <p:nvPr/>
-        </p:nvSpPr>
-        <p:spPr>
-          <a:xfrm>
-            <a:off x="548640" y="384048"/>
-            <a:ext cx="11094415" cy="237744"/>
-          </a:xfrm>
-          <a:prstGeom prst="rect">
-            <a:avLst/>
-          </a:prstGeom>
-          <a:noFill/>
-          <a:ln/>
-        </p:spPr>
-        <p:txBody>
-          <a:bodyPr wrap="square" lIns="0" tIns="0" rIns="0" bIns="0" rtlCol="0" anchor="ctr"/>
-          <a:lstStyle/>
-          <a:p>
-            <a:pPr algn="l" indent="0" marL="0">
-              <a:buNone/>
-            </a:pPr>
-            <a:r>
-              <a:rPr lang="en-US" sz="1100" b="1" spc="200" kern="0" dirty="0">
-                <a:solidFill>
-                  <a:srgbClr val="7FC8BE"/>
-                </a:solidFill>
-                <a:latin typeface="Calibri" pitchFamily="34" charset="0"/>
-                <a:ea typeface="Calibri" pitchFamily="34" charset="-122"/>
-                <a:cs typeface="Calibri" pitchFamily="34" charset="-120"/>
-              </a:rPr>
-              <a:t>EL SIGUIENTE PASO</a:t>
-            </a:r>
-            <a:endParaRPr lang="en-US" sz="1100" dirty="0"/>
-          </a:p>
-        </p:txBody>
-      </p:sp>
-      <p:sp>
-        <p:nvSpPr>
-          <p:cNvPr id="3" name="Text 1"/>
-          <p:cNvSpPr/>
-          <p:nvPr/>
-        </p:nvSpPr>
-        <p:spPr>
-          <a:xfrm>
-            <a:off x="548640" y="658368"/>
-            <a:ext cx="11094415" cy="566928"/>
-          </a:xfrm>
-          <a:prstGeom prst="rect">
-            <a:avLst/>
-          </a:prstGeom>
-          <a:noFill/>
-          <a:ln/>
-        </p:spPr>
-        <p:txBody>
-          <a:bodyPr wrap="square" lIns="0" tIns="0" rIns="0" bIns="0" rtlCol="0" anchor="ctr"/>
-          <a:lstStyle/>
-          <a:p>
-            <a:pPr algn="l" indent="0" marL="0">
-              <a:buNone/>
-            </a:pPr>
-            <a:r>
-              <a:rPr lang="en-US" sz="3200" b="1" dirty="0">
-                <a:solidFill>
-                  <a:srgbClr val="FFFFFF"/>
-                </a:solidFill>
-                <a:latin typeface="Cambria" pitchFamily="34" charset="0"/>
-                <a:ea typeface="Cambria" pitchFamily="34" charset="-122"/>
-                <a:cs typeface="Cambria" pitchFamily="34" charset="-120"/>
-              </a:rPr>
-              <a:t>Lo construido funciona entero. Le falta una casa dentro.</a:t>
-            </a:r>
-            <a:endParaRPr lang="en-US" sz="3200" dirty="0"/>
-          </a:p>
-        </p:txBody>
-      </p:sp>
-      <p:sp>
-        <p:nvSpPr>
-          <p:cNvPr id="4" name="Text 2"/>
-          <p:cNvSpPr/>
-          <p:nvPr/>
-        </p:nvSpPr>
-        <p:spPr>
-          <a:xfrm>
-            <a:off x="548640" y="1371600"/>
-            <a:ext cx="8778240" cy="548640"/>
-          </a:xfrm>
-          <a:prstGeom prst="rect">
-            <a:avLst/>
-          </a:prstGeom>
-          <a:noFill/>
-          <a:ln/>
-        </p:spPr>
-        <p:txBody>
-          <a:bodyPr wrap="square" lIns="0" tIns="0" rIns="0" bIns="0" rtlCol="0" anchor="t"/>
-          <a:lstStyle/>
-          <a:p>
-            <a:pPr indent="0" marL="0">
-              <a:lnSpc>
-                <a:spcPts val="2100"/>
-              </a:lnSpc>
-              <a:buNone/>
-            </a:pPr>
-            <a:r>
-              <a:rPr lang="en-US" sz="1500" dirty="0">
-                <a:solidFill>
-                  <a:srgbClr val="C4D4D1"/>
-                </a:solidFill>
-                <a:latin typeface="Calibri" pitchFamily="34" charset="0"/>
-                <a:ea typeface="Calibri" pitchFamily="34" charset="-122"/>
-                <a:cs typeface="Calibri" pitchFamily="34" charset="-120"/>
-              </a:rPr>
-              <a:t>Un proyecto de software se demuestra ejecutándose en casa de alguien. Esa es, hoy, la única frontera que a DRP le queda por cruzar.</a:t>
-            </a:r>
-            <a:endParaRPr lang="en-US" sz="1500" dirty="0"/>
-          </a:p>
-        </p:txBody>
-      </p:sp>
-      <p:sp>
-        <p:nvSpPr>
-          <p:cNvPr id="5" name="Shape 3"/>
-          <p:cNvSpPr/>
-          <p:nvPr/>
-        </p:nvSpPr>
-        <p:spPr>
-          <a:xfrm>
-            <a:off x="548640" y="2286000"/>
-            <a:ext cx="3502152" cy="2286000"/>
-          </a:xfrm>
-          <a:prstGeom prst="roundRect">
-            <a:avLst>
-              <a:gd name="adj" fmla="val 3600"/>
-            </a:avLst>
-          </a:prstGeom>
-          <a:solidFill>
-            <a:srgbClr val="163A38"/>
-          </a:solidFill>
-          <a:ln w="19050">
-            <a:solidFill>
-              <a:srgbClr val="7FC8BE"/>
-            </a:solidFill>
-            <a:prstDash val="solid"/>
-          </a:ln>
-        </p:spPr>
-      </p:sp>
-      <p:sp>
-        <p:nvSpPr>
-          <p:cNvPr id="6" name="Shape 4"/>
-          <p:cNvSpPr/>
-          <p:nvPr/>
-        </p:nvSpPr>
-        <p:spPr>
-          <a:xfrm>
-            <a:off x="841248" y="2560320"/>
-            <a:ext cx="457200" cy="457200"/>
-          </a:xfrm>
-          <a:prstGeom prst="ellipse">
-            <a:avLst/>
-          </a:prstGeom>
-          <a:solidFill>
-            <a:srgbClr val="2E7B72"/>
-          </a:solidFill>
-          <a:ln w="6350">
-            <a:solidFill>
-              <a:srgbClr val="2E7B72"/>
-            </a:solidFill>
-            <a:prstDash val="solid"/>
-          </a:ln>
-        </p:spPr>
-      </p:sp>
-      <p:sp>
-        <p:nvSpPr>
-          <p:cNvPr id="7" name="Text 5"/>
-          <p:cNvSpPr/>
-          <p:nvPr/>
-        </p:nvSpPr>
-        <p:spPr>
-          <a:xfrm>
-            <a:off x="841248" y="2560320"/>
-            <a:ext cx="457200" cy="457200"/>
-          </a:xfrm>
-          <a:prstGeom prst="rect">
-            <a:avLst/>
-          </a:prstGeom>
-          <a:noFill/>
-          <a:ln/>
-        </p:spPr>
-        <p:txBody>
-          <a:bodyPr wrap="square" lIns="0" tIns="0" rIns="0" bIns="0" rtlCol="0" anchor="ctr"/>
-          <a:lstStyle/>
-          <a:p>
-            <a:pPr algn="ctr" indent="0" marL="0">
-              <a:buNone/>
-            </a:pPr>
-            <a:r>
-              <a:rPr lang="en-US" sz="1700" b="1" dirty="0">
-                <a:solidFill>
-                  <a:srgbClr val="FFFFFF"/>
-                </a:solidFill>
-                <a:latin typeface="Calibri" pitchFamily="34" charset="0"/>
-                <a:ea typeface="Calibri" pitchFamily="34" charset="-122"/>
-                <a:cs typeface="Calibri" pitchFamily="34" charset="-120"/>
-              </a:rPr>
-              <a:t>1</a:t>
-            </a:r>
-            <a:endParaRPr lang="en-US" sz="1700" dirty="0"/>
-          </a:p>
-        </p:txBody>
-      </p:sp>
-      <p:sp>
-        <p:nvSpPr>
-          <p:cNvPr id="8" name="Text 6"/>
-          <p:cNvSpPr/>
-          <p:nvPr/>
-        </p:nvSpPr>
-        <p:spPr>
-          <a:xfrm>
-            <a:off x="841248" y="3108960"/>
-            <a:ext cx="2916936" cy="457200"/>
-          </a:xfrm>
-          <a:prstGeom prst="rect">
-            <a:avLst/>
-          </a:prstGeom>
-          <a:noFill/>
-          <a:ln/>
-        </p:spPr>
-        <p:txBody>
-          <a:bodyPr wrap="square" lIns="0" tIns="0" rIns="0" bIns="0" rtlCol="0" anchor="ctr"/>
-          <a:lstStyle/>
-          <a:p>
-            <a:pPr indent="0" marL="0">
-              <a:buNone/>
-            </a:pPr>
-            <a:r>
-              <a:rPr lang="en-US" sz="2100" b="1" dirty="0">
-                <a:solidFill>
-                  <a:srgbClr val="FFFFFF"/>
-                </a:solidFill>
-                <a:latin typeface="Cambria" pitchFamily="34" charset="0"/>
-                <a:ea typeface="Cambria" pitchFamily="34" charset="-122"/>
-                <a:cs typeface="Cambria" pitchFamily="34" charset="-120"/>
-              </a:rPr>
-              <a:t>Abre tu hogar</a:t>
-            </a:r>
-            <a:endParaRPr lang="en-US" sz="2100" dirty="0"/>
-          </a:p>
-        </p:txBody>
-      </p:sp>
-      <p:sp>
-        <p:nvSpPr>
-          <p:cNvPr id="9" name="Text 7"/>
-          <p:cNvSpPr/>
-          <p:nvPr/>
-        </p:nvSpPr>
-        <p:spPr>
-          <a:xfrm>
-            <a:off x="841248" y="3621024"/>
-            <a:ext cx="2916936" cy="777240"/>
-          </a:xfrm>
-          <a:prstGeom prst="rect">
-            <a:avLst/>
-          </a:prstGeom>
-          <a:noFill/>
-          <a:ln/>
-        </p:spPr>
-        <p:txBody>
-          <a:bodyPr wrap="square" lIns="0" tIns="0" rIns="0" bIns="0" rtlCol="0" anchor="t"/>
-          <a:lstStyle/>
-          <a:p>
-            <a:pPr indent="0" marL="0">
-              <a:lnSpc>
-                <a:spcPts val="1800"/>
-              </a:lnSpc>
-              <a:buNone/>
-            </a:pPr>
-            <a:r>
-              <a:rPr lang="en-US" sz="1250" dirty="0">
-                <a:solidFill>
-                  <a:srgbClr val="C4D4D1"/>
-                </a:solidFill>
-                <a:latin typeface="Calibri" pitchFamily="34" charset="0"/>
-                <a:ea typeface="Calibri" pitchFamily="34" charset="-122"/>
-                <a:cs typeface="Calibri" pitchFamily="34" charset="-120"/>
-              </a:rPr>
-              <a:t>Sé uno de los primeros hogares piloto. Tus preguntas valen más que las respuestas que podamos inventarnos.</a:t>
-            </a:r>
-            <a:endParaRPr lang="en-US" sz="1250" dirty="0"/>
-          </a:p>
-        </p:txBody>
-      </p:sp>
-      <p:sp>
-        <p:nvSpPr>
-          <p:cNvPr id="10" name="Shape 8"/>
-          <p:cNvSpPr/>
-          <p:nvPr/>
-        </p:nvSpPr>
-        <p:spPr>
-          <a:xfrm>
-            <a:off x="4343400" y="2286000"/>
-            <a:ext cx="3502152" cy="2286000"/>
-          </a:xfrm>
-          <a:prstGeom prst="roundRect">
-            <a:avLst>
-              <a:gd name="adj" fmla="val 3600"/>
-            </a:avLst>
-          </a:prstGeom>
-          <a:solidFill>
-            <a:srgbClr val="163A38"/>
-          </a:solidFill>
-          <a:ln w="12700">
-            <a:solidFill>
-              <a:srgbClr val="2F5754"/>
-            </a:solidFill>
-            <a:prstDash val="solid"/>
-          </a:ln>
-        </p:spPr>
-      </p:sp>
-      <p:sp>
-        <p:nvSpPr>
-          <p:cNvPr id="11" name="Shape 9"/>
-          <p:cNvSpPr/>
-          <p:nvPr/>
-        </p:nvSpPr>
-        <p:spPr>
-          <a:xfrm>
-            <a:off x="4636008" y="2560320"/>
-            <a:ext cx="457200" cy="457200"/>
-          </a:xfrm>
-          <a:prstGeom prst="ellipse">
-            <a:avLst/>
-          </a:prstGeom>
-          <a:solidFill>
-            <a:srgbClr val="7FC8BE"/>
-          </a:solidFill>
-          <a:ln w="6350">
-            <a:solidFill>
-              <a:srgbClr val="7FC8BE"/>
-            </a:solidFill>
-            <a:prstDash val="solid"/>
-          </a:ln>
-        </p:spPr>
-      </p:sp>
-      <p:sp>
-        <p:nvSpPr>
-          <p:cNvPr id="12" name="Text 10"/>
-          <p:cNvSpPr/>
-          <p:nvPr/>
-        </p:nvSpPr>
-        <p:spPr>
-          <a:xfrm>
-            <a:off x="4636008" y="2560320"/>
-            <a:ext cx="457200" cy="457200"/>
-          </a:xfrm>
-          <a:prstGeom prst="rect">
-            <a:avLst/>
-          </a:prstGeom>
-          <a:noFill/>
-          <a:ln/>
-        </p:spPr>
-        <p:txBody>
-          <a:bodyPr wrap="square" lIns="0" tIns="0" rIns="0" bIns="0" rtlCol="0" anchor="ctr"/>
-          <a:lstStyle/>
-          <a:p>
-            <a:pPr algn="ctr" indent="0" marL="0">
-              <a:buNone/>
-            </a:pPr>
-            <a:r>
-              <a:rPr lang="en-US" sz="1700" b="1" dirty="0">
-                <a:solidFill>
-                  <a:srgbClr val="12312F"/>
-                </a:solidFill>
-                <a:latin typeface="Calibri" pitchFamily="34" charset="0"/>
-                <a:ea typeface="Calibri" pitchFamily="34" charset="-122"/>
-                <a:cs typeface="Calibri" pitchFamily="34" charset="-120"/>
-              </a:rPr>
-              <a:t>2</a:t>
-            </a:r>
-            <a:endParaRPr lang="en-US" sz="1700" dirty="0"/>
-          </a:p>
-        </p:txBody>
-      </p:sp>
-      <p:sp>
-        <p:nvSpPr>
-          <p:cNvPr id="13" name="Text 11"/>
-          <p:cNvSpPr/>
-          <p:nvPr/>
-        </p:nvSpPr>
-        <p:spPr>
-          <a:xfrm>
-            <a:off x="4636008" y="3108960"/>
-            <a:ext cx="2916936" cy="457200"/>
-          </a:xfrm>
-          <a:prstGeom prst="rect">
-            <a:avLst/>
-          </a:prstGeom>
-          <a:noFill/>
-          <a:ln/>
-        </p:spPr>
-        <p:txBody>
-          <a:bodyPr wrap="square" lIns="0" tIns="0" rIns="0" bIns="0" rtlCol="0" anchor="ctr"/>
-          <a:lstStyle/>
-          <a:p>
-            <a:pPr indent="0" marL="0">
-              <a:buNone/>
-            </a:pPr>
-            <a:r>
-              <a:rPr lang="en-US" sz="2100" b="1" dirty="0">
-                <a:solidFill>
-                  <a:srgbClr val="FFFFFF"/>
-                </a:solidFill>
-                <a:latin typeface="Cambria" pitchFamily="34" charset="0"/>
-                <a:ea typeface="Cambria" pitchFamily="34" charset="-122"/>
-                <a:cs typeface="Cambria" pitchFamily="34" charset="-120"/>
-              </a:rPr>
-              <a:t>Construye un módulo</a:t>
-            </a:r>
-            <a:endParaRPr lang="en-US" sz="2100" dirty="0"/>
-          </a:p>
-        </p:txBody>
-      </p:sp>
-      <p:sp>
-        <p:nvSpPr>
-          <p:cNvPr id="14" name="Text 12"/>
-          <p:cNvSpPr/>
-          <p:nvPr/>
-        </p:nvSpPr>
-        <p:spPr>
-          <a:xfrm>
-            <a:off x="4636008" y="3621024"/>
-            <a:ext cx="2916936" cy="777240"/>
-          </a:xfrm>
-          <a:prstGeom prst="rect">
-            <a:avLst/>
-          </a:prstGeom>
-          <a:noFill/>
-          <a:ln/>
-        </p:spPr>
-        <p:txBody>
-          <a:bodyPr wrap="square" lIns="0" tIns="0" rIns="0" bIns="0" rtlCol="0" anchor="t"/>
-          <a:lstStyle/>
-          <a:p>
-            <a:pPr indent="0" marL="0">
-              <a:lnSpc>
-                <a:spcPts val="1800"/>
-              </a:lnSpc>
-              <a:buNone/>
-            </a:pPr>
-            <a:r>
-              <a:rPr lang="en-US" sz="1250" dirty="0">
-                <a:solidFill>
-                  <a:srgbClr val="C4D4D1"/>
-                </a:solidFill>
-                <a:latin typeface="Calibri" pitchFamily="34" charset="0"/>
-                <a:ea typeface="Calibri" pitchFamily="34" charset="-122"/>
-                <a:cs typeface="Calibri" pitchFamily="34" charset="-120"/>
-              </a:rPr>
-              <a:t>Nueve tienen sitio reservado. Cuatro caminos completos están escritos para copiarlos.</a:t>
-            </a:r>
-            <a:endParaRPr lang="en-US" sz="1250" dirty="0"/>
-          </a:p>
-        </p:txBody>
-      </p:sp>
-      <p:sp>
-        <p:nvSpPr>
-          <p:cNvPr id="15" name="Shape 13"/>
-          <p:cNvSpPr/>
-          <p:nvPr/>
-        </p:nvSpPr>
-        <p:spPr>
-          <a:xfrm>
-            <a:off x="8138160" y="2286000"/>
-            <a:ext cx="3502152" cy="2286000"/>
-          </a:xfrm>
-          <a:prstGeom prst="roundRect">
-            <a:avLst>
-              <a:gd name="adj" fmla="val 3600"/>
-            </a:avLst>
-          </a:prstGeom>
-          <a:solidFill>
-            <a:srgbClr val="163A38"/>
-          </a:solidFill>
-          <a:ln w="12700">
-            <a:solidFill>
-              <a:srgbClr val="2F5754"/>
-            </a:solidFill>
-            <a:prstDash val="solid"/>
-          </a:ln>
-        </p:spPr>
-      </p:sp>
-      <p:sp>
-        <p:nvSpPr>
-          <p:cNvPr id="16" name="Shape 14"/>
-          <p:cNvSpPr/>
-          <p:nvPr/>
-        </p:nvSpPr>
-        <p:spPr>
-          <a:xfrm>
-            <a:off x="8430768" y="2560320"/>
-            <a:ext cx="457200" cy="457200"/>
-          </a:xfrm>
-          <a:prstGeom prst="ellipse">
-            <a:avLst/>
-          </a:prstGeom>
-          <a:solidFill>
-            <a:srgbClr val="C25A32"/>
-          </a:solidFill>
-          <a:ln w="6350">
-            <a:solidFill>
-              <a:srgbClr val="C25A32"/>
-            </a:solidFill>
-            <a:prstDash val="solid"/>
-          </a:ln>
-        </p:spPr>
-      </p:sp>
-      <p:sp>
-        <p:nvSpPr>
-          <p:cNvPr id="17" name="Text 15"/>
-          <p:cNvSpPr/>
-          <p:nvPr/>
-        </p:nvSpPr>
-        <p:spPr>
-          <a:xfrm>
-            <a:off x="8430768" y="2560320"/>
-            <a:ext cx="457200" cy="457200"/>
-          </a:xfrm>
-          <a:prstGeom prst="rect">
-            <a:avLst/>
-          </a:prstGeom>
-          <a:noFill/>
-          <a:ln/>
-        </p:spPr>
-        <p:txBody>
-          <a:bodyPr wrap="square" lIns="0" tIns="0" rIns="0" bIns="0" rtlCol="0" anchor="ctr"/>
-          <a:lstStyle/>
-          <a:p>
-            <a:pPr algn="ctr" indent="0" marL="0">
-              <a:buNone/>
-            </a:pPr>
-            <a:r>
-              <a:rPr lang="en-US" sz="1700" b="1" dirty="0">
-                <a:solidFill>
-                  <a:srgbClr val="FFFFFF"/>
-                </a:solidFill>
-                <a:latin typeface="Calibri" pitchFamily="34" charset="0"/>
-                <a:ea typeface="Calibri" pitchFamily="34" charset="-122"/>
-                <a:cs typeface="Calibri" pitchFamily="34" charset="-120"/>
-              </a:rPr>
-              <a:t>3</a:t>
-            </a:r>
-            <a:endParaRPr lang="en-US" sz="1700" dirty="0"/>
-          </a:p>
-        </p:txBody>
-      </p:sp>
-      <p:sp>
-        <p:nvSpPr>
-          <p:cNvPr id="18" name="Text 16"/>
-          <p:cNvSpPr/>
-          <p:nvPr/>
-        </p:nvSpPr>
-        <p:spPr>
-          <a:xfrm>
-            <a:off x="8430768" y="3108960"/>
-            <a:ext cx="2916936" cy="457200"/>
-          </a:xfrm>
-          <a:prstGeom prst="rect">
-            <a:avLst/>
-          </a:prstGeom>
-          <a:noFill/>
-          <a:ln/>
-        </p:spPr>
-        <p:txBody>
-          <a:bodyPr wrap="square" lIns="0" tIns="0" rIns="0" bIns="0" rtlCol="0" anchor="ctr"/>
-          <a:lstStyle/>
-          <a:p>
-            <a:pPr indent="0" marL="0">
-              <a:buNone/>
-            </a:pPr>
-            <a:r>
-              <a:rPr lang="en-US" sz="2100" b="1" dirty="0">
-                <a:solidFill>
-                  <a:srgbClr val="FFFFFF"/>
-                </a:solidFill>
-                <a:latin typeface="Cambria" pitchFamily="34" charset="0"/>
-                <a:ea typeface="Cambria" pitchFamily="34" charset="-122"/>
-                <a:cs typeface="Cambria" pitchFamily="34" charset="-120"/>
-              </a:rPr>
-              <a:t>Financia el despliegue</a:t>
-            </a:r>
-            <a:endParaRPr lang="en-US" sz="2100" dirty="0"/>
-          </a:p>
-        </p:txBody>
-      </p:sp>
-      <p:sp>
-        <p:nvSpPr>
-          <p:cNvPr id="19" name="Text 17"/>
-          <p:cNvSpPr/>
-          <p:nvPr/>
-        </p:nvSpPr>
-        <p:spPr>
-          <a:xfrm>
-            <a:off x="8430768" y="3621024"/>
-            <a:ext cx="2916936" cy="777240"/>
-          </a:xfrm>
-          <a:prstGeom prst="rect">
-            <a:avLst/>
-          </a:prstGeom>
-          <a:noFill/>
-          <a:ln/>
-        </p:spPr>
-        <p:txBody>
-          <a:bodyPr wrap="square" lIns="0" tIns="0" rIns="0" bIns="0" rtlCol="0" anchor="t"/>
-          <a:lstStyle/>
-          <a:p>
-            <a:pPr indent="0" marL="0">
-              <a:lnSpc>
-                <a:spcPts val="1800"/>
-              </a:lnSpc>
-              <a:buNone/>
-            </a:pPr>
-            <a:r>
-              <a:rPr lang="en-US" sz="1250" dirty="0">
-                <a:solidFill>
-                  <a:srgbClr val="C4D4D1"/>
-                </a:solidFill>
-                <a:latin typeface="Calibri" pitchFamily="34" charset="0"/>
-                <a:ea typeface="Calibri" pitchFamily="34" charset="-122"/>
-                <a:cs typeface="Calibri" pitchFamily="34" charset="-120"/>
-              </a:rPr>
-              <a:t>Poner esto en marcha y sostenerlo es lo que separa un producto construido de un producto usado.</a:t>
-            </a:r>
-            <a:endParaRPr lang="en-US" sz="1250" dirty="0"/>
-          </a:p>
-        </p:txBody>
-      </p:sp>
-      <p:sp>
-        <p:nvSpPr>
-          <p:cNvPr id="20" name="Shape 18"/>
-          <p:cNvSpPr/>
-          <p:nvPr/>
-        </p:nvSpPr>
-        <p:spPr>
-          <a:xfrm>
-            <a:off x="548640" y="4846320"/>
-            <a:ext cx="11094415" cy="1005840"/>
-          </a:xfrm>
-          <a:prstGeom prst="roundRect">
-            <a:avLst>
-              <a:gd name="adj" fmla="val 8182"/>
-            </a:avLst>
-          </a:prstGeom>
-          <a:solidFill>
-            <a:srgbClr val="1B4B48"/>
-          </a:solidFill>
-          <a:ln w="12700">
-            <a:solidFill>
-              <a:srgbClr val="2F5754"/>
-            </a:solidFill>
-            <a:prstDash val="solid"/>
-          </a:ln>
-        </p:spPr>
-      </p:sp>
-      <p:sp>
-        <p:nvSpPr>
-          <p:cNvPr id="21" name="Text 19"/>
-          <p:cNvSpPr/>
-          <p:nvPr/>
-        </p:nvSpPr>
-        <p:spPr>
-          <a:xfrm>
-            <a:off x="932688" y="5010912"/>
-            <a:ext cx="2011680" cy="274320"/>
-          </a:xfrm>
-          <a:prstGeom prst="rect">
-            <a:avLst/>
-          </a:prstGeom>
-          <a:noFill/>
-          <a:ln/>
-        </p:spPr>
-        <p:txBody>
-          <a:bodyPr wrap="square" lIns="0" tIns="0" rIns="0" bIns="0" rtlCol="0" anchor="ctr"/>
-          <a:lstStyle/>
-          <a:p>
-            <a:pPr indent="0" marL="0">
-              <a:buNone/>
-            </a:pPr>
-            <a:r>
-              <a:rPr lang="en-US" sz="1000" b="1" spc="150" kern="0" dirty="0">
-                <a:solidFill>
-                  <a:srgbClr val="7FC8BE"/>
-                </a:solidFill>
-                <a:latin typeface="Calibri" pitchFamily="34" charset="0"/>
-                <a:ea typeface="Calibri" pitchFamily="34" charset="-122"/>
-                <a:cs typeface="Calibri" pitchFamily="34" charset="-120"/>
-              </a:rPr>
-              <a:t>CONTACTO</a:t>
-            </a:r>
-            <a:endParaRPr lang="en-US" sz="1000" dirty="0"/>
-          </a:p>
-        </p:txBody>
-      </p:sp>
-      <p:sp>
-        <p:nvSpPr>
-          <p:cNvPr id="22" name="Text 20"/>
-          <p:cNvSpPr/>
-          <p:nvPr/>
-        </p:nvSpPr>
-        <p:spPr>
-          <a:xfrm>
-            <a:off x="932688" y="5303520"/>
-            <a:ext cx="4937760" cy="310896"/>
-          </a:xfrm>
-          <a:prstGeom prst="rect">
-            <a:avLst/>
-          </a:prstGeom>
-          <a:noFill/>
-          <a:ln/>
-        </p:spPr>
-        <p:txBody>
-          <a:bodyPr wrap="square" lIns="0" tIns="0" rIns="0" bIns="0" rtlCol="0" anchor="ctr"/>
-          <a:lstStyle/>
-          <a:p>
-            <a:pPr indent="0" marL="0">
-              <a:buNone/>
-            </a:pPr>
-            <a:r>
-              <a:rPr lang="en-US" sz="1300" i="1" dirty="0">
-                <a:solidFill>
-                  <a:srgbClr val="C4D4D1"/>
-                </a:solidFill>
-                <a:latin typeface="Calibri" pitchFamily="34" charset="0"/>
-                <a:ea typeface="Calibri" pitchFamily="34" charset="-122"/>
-                <a:cs typeface="Calibri" pitchFamily="34" charset="-120"/>
-              </a:rPr>
-              <a:t>Por completar antes de cada envío.</a:t>
-            </a:r>
-            <a:endParaRPr lang="en-US" sz="1300" dirty="0"/>
-          </a:p>
-        </p:txBody>
-      </p:sp>
-      <p:sp>
-        <p:nvSpPr>
-          <p:cNvPr id="23" name="Text 21"/>
-          <p:cNvSpPr/>
-          <p:nvPr/>
-        </p:nvSpPr>
-        <p:spPr>
-          <a:xfrm>
-            <a:off x="6035040" y="4846320"/>
-            <a:ext cx="5605272" cy="1005840"/>
-          </a:xfrm>
-          <a:prstGeom prst="rect">
-            <a:avLst/>
-          </a:prstGeom>
-          <a:noFill/>
-          <a:ln/>
-        </p:spPr>
-        <p:txBody>
-          <a:bodyPr wrap="square" lIns="0" tIns="0" rIns="0" bIns="0" rtlCol="0" anchor="ctr"/>
-          <a:lstStyle/>
-          <a:p>
-            <a:pPr algn="r" indent="0" marL="0">
-              <a:buNone/>
-            </a:pPr>
-            <a:r>
-              <a:rPr lang="en-US" sz="1200" dirty="0">
-                <a:solidFill>
-                  <a:srgbClr val="C4D4D1"/>
-                </a:solidFill>
-                <a:latin typeface="Calibri" pitchFamily="34" charset="0"/>
-                <a:ea typeface="Calibri" pitchFamily="34" charset="-122"/>
-                <a:cs typeface="Calibri" pitchFamily="34" charset="-120"/>
-              </a:rPr>
-              <a:t>Todo lo que afirma esta presentación se puede comprobar en el propio proyecto.</a:t>
-            </a:r>
-            <a:endParaRPr lang="en-US" sz="1200" dirty="0"/>
-          </a:p>
-        </p:txBody>
-      </p:sp>
-      <p:sp>
-        <p:nvSpPr>
-          <p:cNvPr id="24" name="Text 22"/>
-          <p:cNvSpPr/>
-          <p:nvPr/>
-        </p:nvSpPr>
-        <p:spPr>
-          <a:xfrm>
-            <a:off x="548640" y="6382512"/>
-            <a:ext cx="5486400" cy="256032"/>
-          </a:xfrm>
-          <a:prstGeom prst="rect">
-            <a:avLst/>
-          </a:prstGeom>
-          <a:noFill/>
-          <a:ln/>
-        </p:spPr>
-        <p:txBody>
-          <a:bodyPr wrap="square" lIns="0" tIns="0" rIns="0" bIns="0" rtlCol="0" anchor="ctr"/>
-          <a:lstStyle/>
-          <a:p>
-            <a:pPr indent="0" marL="0">
-              <a:buNone/>
-            </a:pPr>
-            <a:r>
-              <a:rPr lang="en-US" sz="900" dirty="0">
-                <a:solidFill>
-                  <a:srgbClr val="6E8C88"/>
-                </a:solidFill>
-                <a:latin typeface="Calibri" pitchFamily="34" charset="0"/>
-                <a:ea typeface="Calibri" pitchFamily="34" charset="-122"/>
-                <a:cs typeface="Calibri" pitchFamily="34" charset="-120"/>
-              </a:rPr>
-              <a:t>DRP · Domestic Resource Planning</a:t>
-            </a:r>
-            <a:endParaRPr lang="en-US" sz="900" dirty="0"/>
-          </a:p>
-        </p:txBody>
-      </p:sp>
-      <p:sp>
-        <p:nvSpPr>
-          <p:cNvPr id="25" name="Text 23"/>
-          <p:cNvSpPr/>
-          <p:nvPr/>
-        </p:nvSpPr>
-        <p:spPr>
-          <a:xfrm>
-            <a:off x="10545775" y="6382512"/>
-            <a:ext cx="1097280" cy="256032"/>
-          </a:xfrm>
-          <a:prstGeom prst="rect">
-            <a:avLst/>
-          </a:prstGeom>
-          <a:noFill/>
-          <a:ln/>
-        </p:spPr>
-        <p:txBody>
-          <a:bodyPr wrap="square" lIns="0" tIns="0" rIns="0" bIns="0" rtlCol="0" anchor="ctr"/>
-          <a:lstStyle/>
-          <a:p>
-            <a:pPr algn="r" indent="0" marL="0">
-              <a:buNone/>
-            </a:pPr>
-            <a:r>
-              <a:rPr lang="en-US" sz="900" dirty="0">
-                <a:solidFill>
-                  <a:srgbClr val="6E8C88"/>
                 </a:solidFill>
                 <a:latin typeface="Calibri" pitchFamily="34" charset="0"/>
                 <a:ea typeface="Calibri" pitchFamily="34" charset="-122"/>
@@ -10286,47 +9279,180 @@
         </p:nvSpPr>
         <p:spPr>
           <a:xfrm>
-            <a:off x="548640" y="1371600"/>
-            <a:ext cx="11094415" cy="402336"/>
-          </a:xfrm>
-          <a:prstGeom prst="rect">
-            <a:avLst/>
-          </a:prstGeom>
-          <a:noFill/>
-          <a:ln/>
-        </p:spPr>
-        <p:txBody>
-          <a:bodyPr wrap="square" lIns="0" tIns="0" rIns="0" bIns="0" rtlCol="0" anchor="ctr"/>
-          <a:lstStyle/>
-          <a:p>
-            <a:pPr algn="ctr" indent="0" marL="0">
-              <a:buNone/>
-            </a:pPr>
-            <a:r>
-              <a:rPr lang="en-US" sz="2200" b="1" spc="300" kern="0" dirty="0">
-                <a:solidFill>
-                  <a:srgbClr val="1A423F"/>
+            <a:off x="548640" y="384048"/>
+            <a:ext cx="11094415" cy="237744"/>
+          </a:xfrm>
+          <a:prstGeom prst="rect">
+            <a:avLst/>
+          </a:prstGeom>
+          <a:noFill/>
+          <a:ln/>
+        </p:spPr>
+        <p:txBody>
+          <a:bodyPr wrap="square" lIns="0" tIns="0" rIns="0" bIns="0" rtlCol="0" anchor="ctr"/>
+          <a:lstStyle/>
+          <a:p>
+            <a:pPr algn="l" indent="0" marL="0">
+              <a:buNone/>
+            </a:pPr>
+            <a:r>
+              <a:rPr lang="en-US" sz="1100" b="1" spc="200" kern="0" dirty="0">
+                <a:solidFill>
+                  <a:srgbClr val="7FC8BE"/>
+                </a:solidFill>
+                <a:latin typeface="Calibri" pitchFamily="34" charset="0"/>
+                <a:ea typeface="Calibri" pitchFamily="34" charset="-122"/>
+                <a:cs typeface="Calibri" pitchFamily="34" charset="-120"/>
+              </a:rPr>
+              <a:t>EL SIGUIENTE PASO</a:t>
+            </a:r>
+            <a:endParaRPr lang="en-US" sz="1100" dirty="0"/>
+          </a:p>
+        </p:txBody>
+      </p:sp>
+      <p:sp>
+        <p:nvSpPr>
+          <p:cNvPr id="3" name="Text 1"/>
+          <p:cNvSpPr/>
+          <p:nvPr/>
+        </p:nvSpPr>
+        <p:spPr>
+          <a:xfrm>
+            <a:off x="548640" y="658368"/>
+            <a:ext cx="11094415" cy="566928"/>
+          </a:xfrm>
+          <a:prstGeom prst="rect">
+            <a:avLst/>
+          </a:prstGeom>
+          <a:noFill/>
+          <a:ln/>
+        </p:spPr>
+        <p:txBody>
+          <a:bodyPr wrap="square" lIns="0" tIns="0" rIns="0" bIns="0" rtlCol="0" anchor="ctr"/>
+          <a:lstStyle/>
+          <a:p>
+            <a:pPr algn="l" indent="0" marL="0">
+              <a:buNone/>
+            </a:pPr>
+            <a:r>
+              <a:rPr lang="en-US" sz="3200" b="1" dirty="0">
+                <a:solidFill>
+                  <a:srgbClr val="FFFFFF"/>
                 </a:solidFill>
                 <a:latin typeface="Cambria" pitchFamily="34" charset="0"/>
                 <a:ea typeface="Cambria" pitchFamily="34" charset="-122"/>
                 <a:cs typeface="Cambria" pitchFamily="34" charset="-120"/>
               </a:rPr>
-              <a:t>GRACIAS · GRACIAS · GRACIAS · GRACIAS · GRACIAS</a:t>
-            </a:r>
-            <a:endParaRPr lang="en-US" sz="2200" dirty="0"/>
-          </a:p>
-        </p:txBody>
-      </p:sp>
-      <p:sp>
-        <p:nvSpPr>
-          <p:cNvPr id="3" name="Text 1"/>
-          <p:cNvSpPr/>
-          <p:nvPr/>
-        </p:nvSpPr>
-        <p:spPr>
-          <a:xfrm>
-            <a:off x="548640" y="1828800"/>
-            <a:ext cx="11094415" cy="1097280"/>
+              <a:t>Lo construido funciona entero. Le falta una casa dentro.</a:t>
+            </a:r>
+            <a:endParaRPr lang="en-US" sz="3200" dirty="0"/>
+          </a:p>
+        </p:txBody>
+      </p:sp>
+      <p:sp>
+        <p:nvSpPr>
+          <p:cNvPr id="4" name="Text 2"/>
+          <p:cNvSpPr/>
+          <p:nvPr/>
+        </p:nvSpPr>
+        <p:spPr>
+          <a:xfrm>
+            <a:off x="548640" y="1371600"/>
+            <a:ext cx="8778240" cy="548640"/>
+          </a:xfrm>
+          <a:prstGeom prst="rect">
+            <a:avLst/>
+          </a:prstGeom>
+          <a:noFill/>
+          <a:ln/>
+        </p:spPr>
+        <p:txBody>
+          <a:bodyPr wrap="square" lIns="0" tIns="0" rIns="0" bIns="0" rtlCol="0" anchor="t"/>
+          <a:lstStyle/>
+          <a:p>
+            <a:pPr indent="0" marL="0">
+              <a:lnSpc>
+                <a:spcPts val="2100"/>
+              </a:lnSpc>
+              <a:buNone/>
+            </a:pPr>
+            <a:r>
+              <a:rPr lang="en-US" sz="1500" dirty="0">
+                <a:solidFill>
+                  <a:srgbClr val="C4D4D1"/>
+                </a:solidFill>
+                <a:latin typeface="Calibri" pitchFamily="34" charset="0"/>
+                <a:ea typeface="Calibri" pitchFamily="34" charset="-122"/>
+                <a:cs typeface="Calibri" pitchFamily="34" charset="-120"/>
+              </a:rPr>
+              <a:t>Un proyecto de software se demuestra ejecutándose en casa de alguien. Esa es, hoy, la única frontera que a DRP le queda por cruzar.</a:t>
+            </a:r>
+            <a:endParaRPr lang="en-US" sz="1500" dirty="0"/>
+          </a:p>
+        </p:txBody>
+      </p:sp>
+      <p:sp>
+        <p:nvSpPr>
+          <p:cNvPr id="5" name="Shape 3"/>
+          <p:cNvSpPr/>
+          <p:nvPr/>
+        </p:nvSpPr>
+        <p:spPr>
+          <a:xfrm>
+            <a:off x="548640" y="2286000"/>
+            <a:ext cx="3502152" cy="2286000"/>
+          </a:xfrm>
+          <a:prstGeom prst="roundRect">
+            <a:avLst>
+              <a:gd name="adj" fmla="val 3600"/>
+            </a:avLst>
+          </a:prstGeom>
+          <a:solidFill>
+            <a:srgbClr val="163A38"/>
+          </a:solidFill>
+          <a:ln w="19050">
+            <a:solidFill>
+              <a:srgbClr val="7FC8BE"/>
+            </a:solidFill>
+            <a:prstDash val="solid"/>
+          </a:ln>
+        </p:spPr>
+      </p:sp>
+      <p:sp>
+        <p:nvSpPr>
+          <p:cNvPr id="6" name="Shape 4"/>
+          <p:cNvSpPr/>
+          <p:nvPr/>
+        </p:nvSpPr>
+        <p:spPr>
+          <a:xfrm>
+            <a:off x="841248" y="2560320"/>
+            <a:ext cx="457200" cy="457200"/>
+          </a:xfrm>
+          <a:prstGeom prst="ellipse">
+            <a:avLst/>
+          </a:prstGeom>
+          <a:solidFill>
+            <a:srgbClr val="2E7B72"/>
+          </a:solidFill>
+          <a:ln w="6350">
+            <a:solidFill>
+              <a:srgbClr val="2E7B72"/>
+            </a:solidFill>
+            <a:prstDash val="solid"/>
+          </a:ln>
+        </p:spPr>
+      </p:sp>
+      <p:sp>
+        <p:nvSpPr>
+          <p:cNvPr id="7" name="Text 5"/>
+          <p:cNvSpPr/>
+          <p:nvPr/>
+        </p:nvSpPr>
+        <p:spPr>
+          <a:xfrm>
+            <a:off x="841248" y="2560320"/>
+            <a:ext cx="457200" cy="457200"/>
           </a:xfrm>
           <a:prstGeom prst="rect">
             <a:avLst/>
@@ -10342,7 +9468,46 @@
               <a:buNone/>
             </a:pPr>
             <a:r>
-              <a:rPr lang="en-US" sz="6200" b="1" dirty="0">
+              <a:rPr lang="en-US" sz="1700" b="1" dirty="0">
+                <a:solidFill>
+                  <a:srgbClr val="FFFFFF"/>
+                </a:solidFill>
+                <a:latin typeface="Calibri" pitchFamily="34" charset="0"/>
+                <a:ea typeface="Calibri" pitchFamily="34" charset="-122"/>
+                <a:cs typeface="Calibri" pitchFamily="34" charset="-120"/>
+              </a:rPr>
+              <a:t>1</a:t>
+            </a:r>
+            <a:endParaRPr lang="en-US" sz="1700" dirty="0"/>
+          </a:p>
+        </p:txBody>
+      </p:sp>
+      <p:sp>
+        <p:nvSpPr>
+          <p:cNvPr id="8" name="Text 6"/>
+          <p:cNvSpPr/>
+          <p:nvPr/>
+        </p:nvSpPr>
+        <p:spPr>
+          <a:xfrm>
+            <a:off x="841248" y="3108960"/>
+            <a:ext cx="2916936" cy="457200"/>
+          </a:xfrm>
+          <a:prstGeom prst="rect">
+            <a:avLst/>
+          </a:prstGeom>
+          <a:noFill/>
+          <a:ln/>
+        </p:spPr>
+        <p:txBody>
+          <a:bodyPr wrap="square" lIns="0" tIns="0" rIns="0" bIns="0" rtlCol="0" anchor="ctr"/>
+          <a:lstStyle/>
+          <a:p>
+            <a:pPr indent="0" marL="0">
+              <a:buNone/>
+            </a:pPr>
+            <a:r>
+              <a:rPr lang="en-US" sz="2100" b="1" dirty="0">
                 <a:solidFill>
                   <a:srgbClr val="FFFFFF"/>
                 </a:solidFill>
@@ -10350,65 +9515,68 @@
                 <a:ea typeface="Cambria" pitchFamily="34" charset="-122"/>
                 <a:cs typeface="Cambria" pitchFamily="34" charset="-120"/>
               </a:rPr>
-              <a:t>Gracias</a:t>
-            </a:r>
-            <a:endParaRPr lang="en-US" sz="6200" dirty="0"/>
-          </a:p>
-        </p:txBody>
-      </p:sp>
-      <p:sp>
-        <p:nvSpPr>
-          <p:cNvPr id="4" name="Text 2"/>
-          <p:cNvSpPr/>
-          <p:nvPr/>
-        </p:nvSpPr>
-        <p:spPr>
-          <a:xfrm>
-            <a:off x="548640" y="2971800"/>
-            <a:ext cx="11094415" cy="384048"/>
-          </a:xfrm>
-          <a:prstGeom prst="rect">
-            <a:avLst/>
-          </a:prstGeom>
-          <a:noFill/>
-          <a:ln/>
-        </p:spPr>
-        <p:txBody>
-          <a:bodyPr wrap="square" lIns="0" tIns="0" rIns="0" bIns="0" rtlCol="0" anchor="ctr"/>
-          <a:lstStyle/>
-          <a:p>
-            <a:pPr algn="ctr" indent="0" marL="0">
-              <a:buNone/>
-            </a:pPr>
-            <a:r>
-              <a:rPr lang="en-US" sz="1600" dirty="0">
-                <a:solidFill>
-                  <a:srgbClr val="7FC8BE"/>
-                </a:solidFill>
-                <a:latin typeface="Calibri" pitchFamily="34" charset="0"/>
-                <a:ea typeface="Calibri" pitchFamily="34" charset="-122"/>
-                <a:cs typeface="Calibri" pitchFamily="34" charset="-120"/>
-              </a:rPr>
-              <a:t>¿Alguna pregunta?</a:t>
-            </a:r>
-            <a:endParaRPr lang="en-US" sz="1600" dirty="0"/>
-          </a:p>
-        </p:txBody>
-      </p:sp>
-      <p:sp>
-        <p:nvSpPr>
-          <p:cNvPr id="5" name="Shape 3"/>
-          <p:cNvSpPr/>
-          <p:nvPr/>
-        </p:nvSpPr>
-        <p:spPr>
-          <a:xfrm>
-            <a:off x="2377440" y="3749040"/>
-            <a:ext cx="7434072" cy="1572768"/>
+              <a:t>Abre tu hogar</a:t>
+            </a:r>
+            <a:endParaRPr lang="en-US" sz="2100" dirty="0"/>
+          </a:p>
+        </p:txBody>
+      </p:sp>
+      <p:sp>
+        <p:nvSpPr>
+          <p:cNvPr id="9" name="Text 7"/>
+          <p:cNvSpPr/>
+          <p:nvPr/>
+        </p:nvSpPr>
+        <p:spPr>
+          <a:xfrm>
+            <a:off x="841248" y="3621024"/>
+            <a:ext cx="2916936" cy="777240"/>
+          </a:xfrm>
+          <a:prstGeom prst="rect">
+            <a:avLst/>
+          </a:prstGeom>
+          <a:noFill/>
+          <a:ln/>
+        </p:spPr>
+        <p:txBody>
+          <a:bodyPr wrap="square" lIns="0" tIns="0" rIns="0" bIns="0" rtlCol="0" anchor="t"/>
+          <a:lstStyle/>
+          <a:p>
+            <a:pPr indent="0" marL="0">
+              <a:lnSpc>
+                <a:spcPts val="1800"/>
+              </a:lnSpc>
+              <a:buNone/>
+            </a:pPr>
+            <a:r>
+              <a:rPr lang="en-US" sz="1250" dirty="0">
+                <a:solidFill>
+                  <a:srgbClr val="C4D4D1"/>
+                </a:solidFill>
+                <a:latin typeface="Calibri" pitchFamily="34" charset="0"/>
+                <a:ea typeface="Calibri" pitchFamily="34" charset="-122"/>
+                <a:cs typeface="Calibri" pitchFamily="34" charset="-120"/>
+              </a:rPr>
+              <a:t>Sé uno de los primeros hogares piloto. Tus preguntas valen más que las respuestas que podamos inventarnos.</a:t>
+            </a:r>
+            <a:endParaRPr lang="en-US" sz="1250" dirty="0"/>
+          </a:p>
+        </p:txBody>
+      </p:sp>
+      <p:sp>
+        <p:nvSpPr>
+          <p:cNvPr id="10" name="Shape 8"/>
+          <p:cNvSpPr/>
+          <p:nvPr/>
+        </p:nvSpPr>
+        <p:spPr>
+          <a:xfrm>
+            <a:off x="4343400" y="2286000"/>
+            <a:ext cx="3502152" cy="2286000"/>
           </a:xfrm>
           <a:prstGeom prst="roundRect">
             <a:avLst>
-              <a:gd name="adj" fmla="val 5233"/>
+              <a:gd name="adj" fmla="val 3600"/>
             </a:avLst>
           </a:prstGeom>
           <a:solidFill>
@@ -10424,6 +9592,721 @@
       </p:sp>
       <p:sp>
         <p:nvSpPr>
+          <p:cNvPr id="11" name="Shape 9"/>
+          <p:cNvSpPr/>
+          <p:nvPr/>
+        </p:nvSpPr>
+        <p:spPr>
+          <a:xfrm>
+            <a:off x="4636008" y="2560320"/>
+            <a:ext cx="457200" cy="457200"/>
+          </a:xfrm>
+          <a:prstGeom prst="ellipse">
+            <a:avLst/>
+          </a:prstGeom>
+          <a:solidFill>
+            <a:srgbClr val="7FC8BE"/>
+          </a:solidFill>
+          <a:ln w="6350">
+            <a:solidFill>
+              <a:srgbClr val="7FC8BE"/>
+            </a:solidFill>
+            <a:prstDash val="solid"/>
+          </a:ln>
+        </p:spPr>
+      </p:sp>
+      <p:sp>
+        <p:nvSpPr>
+          <p:cNvPr id="12" name="Text 10"/>
+          <p:cNvSpPr/>
+          <p:nvPr/>
+        </p:nvSpPr>
+        <p:spPr>
+          <a:xfrm>
+            <a:off x="4636008" y="2560320"/>
+            <a:ext cx="457200" cy="457200"/>
+          </a:xfrm>
+          <a:prstGeom prst="rect">
+            <a:avLst/>
+          </a:prstGeom>
+          <a:noFill/>
+          <a:ln/>
+        </p:spPr>
+        <p:txBody>
+          <a:bodyPr wrap="square" lIns="0" tIns="0" rIns="0" bIns="0" rtlCol="0" anchor="ctr"/>
+          <a:lstStyle/>
+          <a:p>
+            <a:pPr algn="ctr" indent="0" marL="0">
+              <a:buNone/>
+            </a:pPr>
+            <a:r>
+              <a:rPr lang="en-US" sz="1700" b="1" dirty="0">
+                <a:solidFill>
+                  <a:srgbClr val="12312F"/>
+                </a:solidFill>
+                <a:latin typeface="Calibri" pitchFamily="34" charset="0"/>
+                <a:ea typeface="Calibri" pitchFamily="34" charset="-122"/>
+                <a:cs typeface="Calibri" pitchFamily="34" charset="-120"/>
+              </a:rPr>
+              <a:t>2</a:t>
+            </a:r>
+            <a:endParaRPr lang="en-US" sz="1700" dirty="0"/>
+          </a:p>
+        </p:txBody>
+      </p:sp>
+      <p:sp>
+        <p:nvSpPr>
+          <p:cNvPr id="13" name="Text 11"/>
+          <p:cNvSpPr/>
+          <p:nvPr/>
+        </p:nvSpPr>
+        <p:spPr>
+          <a:xfrm>
+            <a:off x="4636008" y="3108960"/>
+            <a:ext cx="2916936" cy="457200"/>
+          </a:xfrm>
+          <a:prstGeom prst="rect">
+            <a:avLst/>
+          </a:prstGeom>
+          <a:noFill/>
+          <a:ln/>
+        </p:spPr>
+        <p:txBody>
+          <a:bodyPr wrap="square" lIns="0" tIns="0" rIns="0" bIns="0" rtlCol="0" anchor="ctr"/>
+          <a:lstStyle/>
+          <a:p>
+            <a:pPr indent="0" marL="0">
+              <a:buNone/>
+            </a:pPr>
+            <a:r>
+              <a:rPr lang="en-US" sz="2100" b="1" dirty="0">
+                <a:solidFill>
+                  <a:srgbClr val="FFFFFF"/>
+                </a:solidFill>
+                <a:latin typeface="Cambria" pitchFamily="34" charset="0"/>
+                <a:ea typeface="Cambria" pitchFamily="34" charset="-122"/>
+                <a:cs typeface="Cambria" pitchFamily="34" charset="-120"/>
+              </a:rPr>
+              <a:t>Construye un módulo</a:t>
+            </a:r>
+            <a:endParaRPr lang="en-US" sz="2100" dirty="0"/>
+          </a:p>
+        </p:txBody>
+      </p:sp>
+      <p:sp>
+        <p:nvSpPr>
+          <p:cNvPr id="14" name="Text 12"/>
+          <p:cNvSpPr/>
+          <p:nvPr/>
+        </p:nvSpPr>
+        <p:spPr>
+          <a:xfrm>
+            <a:off x="4636008" y="3621024"/>
+            <a:ext cx="2916936" cy="777240"/>
+          </a:xfrm>
+          <a:prstGeom prst="rect">
+            <a:avLst/>
+          </a:prstGeom>
+          <a:noFill/>
+          <a:ln/>
+        </p:spPr>
+        <p:txBody>
+          <a:bodyPr wrap="square" lIns="0" tIns="0" rIns="0" bIns="0" rtlCol="0" anchor="t"/>
+          <a:lstStyle/>
+          <a:p>
+            <a:pPr indent="0" marL="0">
+              <a:lnSpc>
+                <a:spcPts val="1800"/>
+              </a:lnSpc>
+              <a:buNone/>
+            </a:pPr>
+            <a:r>
+              <a:rPr lang="en-US" sz="1250" dirty="0">
+                <a:solidFill>
+                  <a:srgbClr val="C4D4D1"/>
+                </a:solidFill>
+                <a:latin typeface="Calibri" pitchFamily="34" charset="0"/>
+                <a:ea typeface="Calibri" pitchFamily="34" charset="-122"/>
+                <a:cs typeface="Calibri" pitchFamily="34" charset="-120"/>
+              </a:rPr>
+              <a:t>Nueve tienen sitio reservado. Cuatro caminos completos están escritos para copiarlos.</a:t>
+            </a:r>
+            <a:endParaRPr lang="en-US" sz="1250" dirty="0"/>
+          </a:p>
+        </p:txBody>
+      </p:sp>
+      <p:sp>
+        <p:nvSpPr>
+          <p:cNvPr id="15" name="Shape 13"/>
+          <p:cNvSpPr/>
+          <p:nvPr/>
+        </p:nvSpPr>
+        <p:spPr>
+          <a:xfrm>
+            <a:off x="8138160" y="2286000"/>
+            <a:ext cx="3502152" cy="2286000"/>
+          </a:xfrm>
+          <a:prstGeom prst="roundRect">
+            <a:avLst>
+              <a:gd name="adj" fmla="val 3600"/>
+            </a:avLst>
+          </a:prstGeom>
+          <a:solidFill>
+            <a:srgbClr val="163A38"/>
+          </a:solidFill>
+          <a:ln w="12700">
+            <a:solidFill>
+              <a:srgbClr val="2F5754"/>
+            </a:solidFill>
+            <a:prstDash val="solid"/>
+          </a:ln>
+        </p:spPr>
+      </p:sp>
+      <p:sp>
+        <p:nvSpPr>
+          <p:cNvPr id="16" name="Shape 14"/>
+          <p:cNvSpPr/>
+          <p:nvPr/>
+        </p:nvSpPr>
+        <p:spPr>
+          <a:xfrm>
+            <a:off x="8430768" y="2560320"/>
+            <a:ext cx="457200" cy="457200"/>
+          </a:xfrm>
+          <a:prstGeom prst="ellipse">
+            <a:avLst/>
+          </a:prstGeom>
+          <a:solidFill>
+            <a:srgbClr val="C25A32"/>
+          </a:solidFill>
+          <a:ln w="6350">
+            <a:solidFill>
+              <a:srgbClr val="C25A32"/>
+            </a:solidFill>
+            <a:prstDash val="solid"/>
+          </a:ln>
+        </p:spPr>
+      </p:sp>
+      <p:sp>
+        <p:nvSpPr>
+          <p:cNvPr id="17" name="Text 15"/>
+          <p:cNvSpPr/>
+          <p:nvPr/>
+        </p:nvSpPr>
+        <p:spPr>
+          <a:xfrm>
+            <a:off x="8430768" y="2560320"/>
+            <a:ext cx="457200" cy="457200"/>
+          </a:xfrm>
+          <a:prstGeom prst="rect">
+            <a:avLst/>
+          </a:prstGeom>
+          <a:noFill/>
+          <a:ln/>
+        </p:spPr>
+        <p:txBody>
+          <a:bodyPr wrap="square" lIns="0" tIns="0" rIns="0" bIns="0" rtlCol="0" anchor="ctr"/>
+          <a:lstStyle/>
+          <a:p>
+            <a:pPr algn="ctr" indent="0" marL="0">
+              <a:buNone/>
+            </a:pPr>
+            <a:r>
+              <a:rPr lang="en-US" sz="1700" b="1" dirty="0">
+                <a:solidFill>
+                  <a:srgbClr val="FFFFFF"/>
+                </a:solidFill>
+                <a:latin typeface="Calibri" pitchFamily="34" charset="0"/>
+                <a:ea typeface="Calibri" pitchFamily="34" charset="-122"/>
+                <a:cs typeface="Calibri" pitchFamily="34" charset="-120"/>
+              </a:rPr>
+              <a:t>3</a:t>
+            </a:r>
+            <a:endParaRPr lang="en-US" sz="1700" dirty="0"/>
+          </a:p>
+        </p:txBody>
+      </p:sp>
+      <p:sp>
+        <p:nvSpPr>
+          <p:cNvPr id="18" name="Text 16"/>
+          <p:cNvSpPr/>
+          <p:nvPr/>
+        </p:nvSpPr>
+        <p:spPr>
+          <a:xfrm>
+            <a:off x="8430768" y="3108960"/>
+            <a:ext cx="2916936" cy="457200"/>
+          </a:xfrm>
+          <a:prstGeom prst="rect">
+            <a:avLst/>
+          </a:prstGeom>
+          <a:noFill/>
+          <a:ln/>
+        </p:spPr>
+        <p:txBody>
+          <a:bodyPr wrap="square" lIns="0" tIns="0" rIns="0" bIns="0" rtlCol="0" anchor="ctr"/>
+          <a:lstStyle/>
+          <a:p>
+            <a:pPr indent="0" marL="0">
+              <a:buNone/>
+            </a:pPr>
+            <a:r>
+              <a:rPr lang="en-US" sz="2100" b="1" dirty="0">
+                <a:solidFill>
+                  <a:srgbClr val="FFFFFF"/>
+                </a:solidFill>
+                <a:latin typeface="Cambria" pitchFamily="34" charset="0"/>
+                <a:ea typeface="Cambria" pitchFamily="34" charset="-122"/>
+                <a:cs typeface="Cambria" pitchFamily="34" charset="-120"/>
+              </a:rPr>
+              <a:t>Sostén lo desplegado</a:t>
+            </a:r>
+            <a:endParaRPr lang="en-US" sz="2100" dirty="0"/>
+          </a:p>
+        </p:txBody>
+      </p:sp>
+      <p:sp>
+        <p:nvSpPr>
+          <p:cNvPr id="19" name="Text 17"/>
+          <p:cNvSpPr/>
+          <p:nvPr/>
+        </p:nvSpPr>
+        <p:spPr>
+          <a:xfrm>
+            <a:off x="8430768" y="3621024"/>
+            <a:ext cx="2916936" cy="777240"/>
+          </a:xfrm>
+          <a:prstGeom prst="rect">
+            <a:avLst/>
+          </a:prstGeom>
+          <a:noFill/>
+          <a:ln/>
+        </p:spPr>
+        <p:txBody>
+          <a:bodyPr wrap="square" lIns="0" tIns="0" rIns="0" bIns="0" rtlCol="0" anchor="t"/>
+          <a:lstStyle/>
+          <a:p>
+            <a:pPr indent="0" marL="0">
+              <a:lnSpc>
+                <a:spcPts val="1800"/>
+              </a:lnSpc>
+              <a:buNone/>
+            </a:pPr>
+            <a:r>
+              <a:rPr lang="en-US" sz="1250" dirty="0">
+                <a:solidFill>
+                  <a:srgbClr val="C4D4D1"/>
+                </a:solidFill>
+                <a:latin typeface="Calibri" pitchFamily="34" charset="0"/>
+                <a:ea typeface="Calibri" pitchFamily="34" charset="-122"/>
+                <a:cs typeface="Calibri" pitchFamily="34" charset="-120"/>
+              </a:rPr>
+              <a:t>El servidor ya corre. Sostenerlo en marcha y dar tiempo a la Fase 3 es lo que separa un arranque de un camino.</a:t>
+            </a:r>
+            <a:endParaRPr lang="en-US" sz="1250" dirty="0"/>
+          </a:p>
+        </p:txBody>
+      </p:sp>
+      <p:sp>
+        <p:nvSpPr>
+          <p:cNvPr id="20" name="Shape 18"/>
+          <p:cNvSpPr/>
+          <p:nvPr/>
+        </p:nvSpPr>
+        <p:spPr>
+          <a:xfrm>
+            <a:off x="548640" y="4846320"/>
+            <a:ext cx="11094415" cy="1005840"/>
+          </a:xfrm>
+          <a:prstGeom prst="roundRect">
+            <a:avLst>
+              <a:gd name="adj" fmla="val 8182"/>
+            </a:avLst>
+          </a:prstGeom>
+          <a:solidFill>
+            <a:srgbClr val="1B4B48"/>
+          </a:solidFill>
+          <a:ln w="12700">
+            <a:solidFill>
+              <a:srgbClr val="2F5754"/>
+            </a:solidFill>
+            <a:prstDash val="solid"/>
+          </a:ln>
+        </p:spPr>
+      </p:sp>
+      <p:sp>
+        <p:nvSpPr>
+          <p:cNvPr id="21" name="Text 19"/>
+          <p:cNvSpPr/>
+          <p:nvPr/>
+        </p:nvSpPr>
+        <p:spPr>
+          <a:xfrm>
+            <a:off x="932688" y="5010912"/>
+            <a:ext cx="2011680" cy="274320"/>
+          </a:xfrm>
+          <a:prstGeom prst="rect">
+            <a:avLst/>
+          </a:prstGeom>
+          <a:noFill/>
+          <a:ln/>
+        </p:spPr>
+        <p:txBody>
+          <a:bodyPr wrap="square" lIns="0" tIns="0" rIns="0" bIns="0" rtlCol="0" anchor="ctr"/>
+          <a:lstStyle/>
+          <a:p>
+            <a:pPr indent="0" marL="0">
+              <a:buNone/>
+            </a:pPr>
+            <a:r>
+              <a:rPr lang="en-US" sz="1000" b="1" spc="150" kern="0" dirty="0">
+                <a:solidFill>
+                  <a:srgbClr val="7FC8BE"/>
+                </a:solidFill>
+                <a:latin typeface="Calibri" pitchFamily="34" charset="0"/>
+                <a:ea typeface="Calibri" pitchFamily="34" charset="-122"/>
+                <a:cs typeface="Calibri" pitchFamily="34" charset="-120"/>
+              </a:rPr>
+              <a:t>CONTACTO</a:t>
+            </a:r>
+            <a:endParaRPr lang="en-US" sz="1000" dirty="0"/>
+          </a:p>
+        </p:txBody>
+      </p:sp>
+      <p:sp>
+        <p:nvSpPr>
+          <p:cNvPr id="22" name="Text 20"/>
+          <p:cNvSpPr/>
+          <p:nvPr/>
+        </p:nvSpPr>
+        <p:spPr>
+          <a:xfrm>
+            <a:off x="932688" y="5303520"/>
+            <a:ext cx="4937760" cy="310896"/>
+          </a:xfrm>
+          <a:prstGeom prst="rect">
+            <a:avLst/>
+          </a:prstGeom>
+          <a:noFill/>
+          <a:ln/>
+        </p:spPr>
+        <p:txBody>
+          <a:bodyPr wrap="square" lIns="0" tIns="0" rIns="0" bIns="0" rtlCol="0" anchor="ctr"/>
+          <a:lstStyle/>
+          <a:p>
+            <a:pPr indent="0" marL="0">
+              <a:buNone/>
+            </a:pPr>
+            <a:r>
+              <a:rPr lang="en-US" sz="1300" i="1" dirty="0">
+                <a:solidFill>
+                  <a:srgbClr val="C4D4D1"/>
+                </a:solidFill>
+                <a:latin typeface="Calibri" pitchFamily="34" charset="0"/>
+                <a:ea typeface="Calibri" pitchFamily="34" charset="-122"/>
+                <a:cs typeface="Calibri" pitchFamily="34" charset="-120"/>
+              </a:rPr>
+              <a:t>Por completar antes de cada envío.</a:t>
+            </a:r>
+            <a:endParaRPr lang="en-US" sz="1300" dirty="0"/>
+          </a:p>
+        </p:txBody>
+      </p:sp>
+      <p:sp>
+        <p:nvSpPr>
+          <p:cNvPr id="23" name="Text 21"/>
+          <p:cNvSpPr/>
+          <p:nvPr/>
+        </p:nvSpPr>
+        <p:spPr>
+          <a:xfrm>
+            <a:off x="6035040" y="4846320"/>
+            <a:ext cx="5605272" cy="1005840"/>
+          </a:xfrm>
+          <a:prstGeom prst="rect">
+            <a:avLst/>
+          </a:prstGeom>
+          <a:noFill/>
+          <a:ln/>
+        </p:spPr>
+        <p:txBody>
+          <a:bodyPr wrap="square" lIns="0" tIns="0" rIns="0" bIns="0" rtlCol="0" anchor="ctr"/>
+          <a:lstStyle/>
+          <a:p>
+            <a:pPr algn="r" indent="0" marL="0">
+              <a:buNone/>
+            </a:pPr>
+            <a:r>
+              <a:rPr lang="en-US" sz="1200" dirty="0">
+                <a:solidFill>
+                  <a:srgbClr val="C4D4D1"/>
+                </a:solidFill>
+                <a:latin typeface="Calibri" pitchFamily="34" charset="0"/>
+                <a:ea typeface="Calibri" pitchFamily="34" charset="-122"/>
+                <a:cs typeface="Calibri" pitchFamily="34" charset="-120"/>
+              </a:rPr>
+              <a:t>Todo lo que afirma esta presentación se puede comprobar en el propio proyecto.</a:t>
+            </a:r>
+            <a:endParaRPr lang="en-US" sz="1200" dirty="0"/>
+          </a:p>
+        </p:txBody>
+      </p:sp>
+      <p:sp>
+        <p:nvSpPr>
+          <p:cNvPr id="24" name="Text 22"/>
+          <p:cNvSpPr/>
+          <p:nvPr/>
+        </p:nvSpPr>
+        <p:spPr>
+          <a:xfrm>
+            <a:off x="548640" y="6382512"/>
+            <a:ext cx="5486400" cy="256032"/>
+          </a:xfrm>
+          <a:prstGeom prst="rect">
+            <a:avLst/>
+          </a:prstGeom>
+          <a:noFill/>
+          <a:ln/>
+        </p:spPr>
+        <p:txBody>
+          <a:bodyPr wrap="square" lIns="0" tIns="0" rIns="0" bIns="0" rtlCol="0" anchor="ctr"/>
+          <a:lstStyle/>
+          <a:p>
+            <a:pPr indent="0" marL="0">
+              <a:buNone/>
+            </a:pPr>
+            <a:r>
+              <a:rPr lang="en-US" sz="900" dirty="0">
+                <a:solidFill>
+                  <a:srgbClr val="6E8C88"/>
+                </a:solidFill>
+                <a:latin typeface="Calibri" pitchFamily="34" charset="0"/>
+                <a:ea typeface="Calibri" pitchFamily="34" charset="-122"/>
+                <a:cs typeface="Calibri" pitchFamily="34" charset="-120"/>
+              </a:rPr>
+              <a:t>DRP · Domestic Resource Planning</a:t>
+            </a:r>
+            <a:endParaRPr lang="en-US" sz="900" dirty="0"/>
+          </a:p>
+        </p:txBody>
+      </p:sp>
+      <p:sp>
+        <p:nvSpPr>
+          <p:cNvPr id="25" name="Text 23"/>
+          <p:cNvSpPr/>
+          <p:nvPr/>
+        </p:nvSpPr>
+        <p:spPr>
+          <a:xfrm>
+            <a:off x="10545775" y="6382512"/>
+            <a:ext cx="1097280" cy="256032"/>
+          </a:xfrm>
+          <a:prstGeom prst="rect">
+            <a:avLst/>
+          </a:prstGeom>
+          <a:noFill/>
+          <a:ln/>
+        </p:spPr>
+        <p:txBody>
+          <a:bodyPr wrap="square" lIns="0" tIns="0" rIns="0" bIns="0" rtlCol="0" anchor="ctr"/>
+          <a:lstStyle/>
+          <a:p>
+            <a:pPr algn="r" indent="0" marL="0">
+              <a:buNone/>
+            </a:pPr>
+            <a:r>
+              <a:rPr lang="en-US" sz="900" dirty="0">
+                <a:solidFill>
+                  <a:srgbClr val="6E8C88"/>
+                </a:solidFill>
+                <a:latin typeface="Calibri" pitchFamily="34" charset="0"/>
+                <a:ea typeface="Calibri" pitchFamily="34" charset="-122"/>
+                <a:cs typeface="Calibri" pitchFamily="34" charset="-120"/>
+              </a:rPr>
+              <a:t>15</a:t>
+            </a:r>
+            <a:endParaRPr lang="en-US" sz="900" dirty="0"/>
+          </a:p>
+        </p:txBody>
+      </p:sp>
+    </p:spTree>
+  </p:cSld>
+  <p:clrMapOvr>
+    <a:masterClrMapping/>
+  </p:clrMapOvr>
+</p:sld>
+</file>
+
+<file path=ppt/slides/slide17.xml><?xml version="1.0" encoding="utf-8"?>
+<p:sld xmlns:a="http://schemas.openxmlformats.org/drawingml/2006/main" xmlns:r="http://schemas.openxmlformats.org/officeDocument/2006/relationships" xmlns:p="http://schemas.openxmlformats.org/presentationml/2006/main">
+  <p:cSld name="Slide 17">
+    <p:bg>
+      <p:bgPr>
+        <a:solidFill>
+          <a:srgbClr val="12312F"/>
+        </a:solidFill>
+      </p:bgPr>
+    </p:bg>
+    <p:spTree>
+      <p:nvGrpSpPr>
+        <p:cNvPr id="1" name=""/>
+        <p:cNvGrpSpPr/>
+        <p:nvPr/>
+      </p:nvGrpSpPr>
+      <p:grpSpPr>
+        <a:xfrm>
+          <a:off x="0" y="0"/>
+          <a:ext cx="0" cy="0"/>
+          <a:chOff x="0" y="0"/>
+          <a:chExt cx="0" cy="0"/>
+        </a:xfrm>
+      </p:grpSpPr>
+      <p:sp>
+        <p:nvSpPr>
+          <p:cNvPr id="2" name="Text 0"/>
+          <p:cNvSpPr/>
+          <p:nvPr/>
+        </p:nvSpPr>
+        <p:spPr>
+          <a:xfrm>
+            <a:off x="548640" y="1371600"/>
+            <a:ext cx="11094415" cy="402336"/>
+          </a:xfrm>
+          <a:prstGeom prst="rect">
+            <a:avLst/>
+          </a:prstGeom>
+          <a:noFill/>
+          <a:ln/>
+        </p:spPr>
+        <p:txBody>
+          <a:bodyPr wrap="square" lIns="0" tIns="0" rIns="0" bIns="0" rtlCol="0" anchor="ctr"/>
+          <a:lstStyle/>
+          <a:p>
+            <a:pPr algn="ctr" indent="0" marL="0">
+              <a:buNone/>
+            </a:pPr>
+            <a:r>
+              <a:rPr lang="en-US" sz="2200" b="1" spc="300" kern="0" dirty="0">
+                <a:solidFill>
+                  <a:srgbClr val="1A423F"/>
+                </a:solidFill>
+                <a:latin typeface="Cambria" pitchFamily="34" charset="0"/>
+                <a:ea typeface="Cambria" pitchFamily="34" charset="-122"/>
+                <a:cs typeface="Cambria" pitchFamily="34" charset="-120"/>
+              </a:rPr>
+              <a:t>GRACIAS · GRACIAS · GRACIAS · GRACIAS · GRACIAS</a:t>
+            </a:r>
+            <a:endParaRPr lang="en-US" sz="2200" dirty="0"/>
+          </a:p>
+        </p:txBody>
+      </p:sp>
+      <p:sp>
+        <p:nvSpPr>
+          <p:cNvPr id="3" name="Text 1"/>
+          <p:cNvSpPr/>
+          <p:nvPr/>
+        </p:nvSpPr>
+        <p:spPr>
+          <a:xfrm>
+            <a:off x="548640" y="1828800"/>
+            <a:ext cx="11094415" cy="1097280"/>
+          </a:xfrm>
+          <a:prstGeom prst="rect">
+            <a:avLst/>
+          </a:prstGeom>
+          <a:noFill/>
+          <a:ln/>
+        </p:spPr>
+        <p:txBody>
+          <a:bodyPr wrap="square" lIns="0" tIns="0" rIns="0" bIns="0" rtlCol="0" anchor="ctr"/>
+          <a:lstStyle/>
+          <a:p>
+            <a:pPr algn="ctr" indent="0" marL="0">
+              <a:buNone/>
+            </a:pPr>
+            <a:r>
+              <a:rPr lang="en-US" sz="6200" b="1" dirty="0">
+                <a:solidFill>
+                  <a:srgbClr val="FFFFFF"/>
+                </a:solidFill>
+                <a:latin typeface="Cambria" pitchFamily="34" charset="0"/>
+                <a:ea typeface="Cambria" pitchFamily="34" charset="-122"/>
+                <a:cs typeface="Cambria" pitchFamily="34" charset="-120"/>
+              </a:rPr>
+              <a:t>Gracias</a:t>
+            </a:r>
+            <a:endParaRPr lang="en-US" sz="6200" dirty="0"/>
+          </a:p>
+        </p:txBody>
+      </p:sp>
+      <p:sp>
+        <p:nvSpPr>
+          <p:cNvPr id="4" name="Text 2"/>
+          <p:cNvSpPr/>
+          <p:nvPr/>
+        </p:nvSpPr>
+        <p:spPr>
+          <a:xfrm>
+            <a:off x="548640" y="2971800"/>
+            <a:ext cx="11094415" cy="384048"/>
+          </a:xfrm>
+          <a:prstGeom prst="rect">
+            <a:avLst/>
+          </a:prstGeom>
+          <a:noFill/>
+          <a:ln/>
+        </p:spPr>
+        <p:txBody>
+          <a:bodyPr wrap="square" lIns="0" tIns="0" rIns="0" bIns="0" rtlCol="0" anchor="ctr"/>
+          <a:lstStyle/>
+          <a:p>
+            <a:pPr algn="ctr" indent="0" marL="0">
+              <a:buNone/>
+            </a:pPr>
+            <a:r>
+              <a:rPr lang="en-US" sz="1600" dirty="0">
+                <a:solidFill>
+                  <a:srgbClr val="7FC8BE"/>
+                </a:solidFill>
+                <a:latin typeface="Calibri" pitchFamily="34" charset="0"/>
+                <a:ea typeface="Calibri" pitchFamily="34" charset="-122"/>
+                <a:cs typeface="Calibri" pitchFamily="34" charset="-120"/>
+              </a:rPr>
+              <a:t>¿Alguna pregunta?</a:t>
+            </a:r>
+            <a:endParaRPr lang="en-US" sz="1600" dirty="0"/>
+          </a:p>
+        </p:txBody>
+      </p:sp>
+      <p:sp>
+        <p:nvSpPr>
+          <p:cNvPr id="5" name="Shape 3"/>
+          <p:cNvSpPr/>
+          <p:nvPr/>
+        </p:nvSpPr>
+        <p:spPr>
+          <a:xfrm>
+            <a:off x="2377440" y="3749040"/>
+            <a:ext cx="7434072" cy="1572768"/>
+          </a:xfrm>
+          <a:prstGeom prst="roundRect">
+            <a:avLst>
+              <a:gd name="adj" fmla="val 5233"/>
+            </a:avLst>
+          </a:prstGeom>
+          <a:solidFill>
+            <a:srgbClr val="163A38"/>
+          </a:solidFill>
+          <a:ln w="12700">
+            <a:solidFill>
+              <a:srgbClr val="2F5754"/>
+            </a:solidFill>
+            <a:prstDash val="solid"/>
+          </a:ln>
+        </p:spPr>
+      </p:sp>
+      <p:sp>
+        <p:nvSpPr>
           <p:cNvPr id="6" name="Text 4"/>
           <p:cNvSpPr/>
           <p:nvPr/>
@@ -10673,7 +10556,7 @@
                 <a:ea typeface="Calibri" pitchFamily="34" charset="-122"/>
                 <a:cs typeface="Calibri" pitchFamily="34" charset="-120"/>
               </a:rPr>
-              <a:t>15</a:t>
+              <a:t>16</a:t>
             </a:r>
             <a:endParaRPr lang="en-US" sz="900" dirty="0"/>
           </a:p>
@@ -16557,7 +16440,7 @@
                 <a:ea typeface="Calibri" pitchFamily="34" charset="-122"/>
                 <a:cs typeface="Calibri" pitchFamily="34" charset="-120"/>
               </a:rPr>
-              <a:t>Escena ilustrativa: ningún hogar real usa todavía DRP. Todo lo que ocurre en ella está construido, pero aún no desplegado.</a:t>
+              <a:t>Escena ilustrativa: ningún hogar real usa todavía DRP. Todo lo que ocurre en ella está construido y en producción; la familia es inventada.</a:t>
             </a:r>
             <a:endParaRPr lang="en-US" sz="1200" dirty="0"/>
           </a:p>
